--- a/Santander_June2026_Changes.pptx
+++ b/Santander_June2026_Changes.pptx
@@ -16,6 +16,10 @@
     <p:sldId id="264" r:id="rId15"/>
     <p:sldId id="265" r:id="rId16"/>
     <p:sldId id="266" r:id="rId17"/>
+    <p:sldId id="267" r:id="rId18"/>
+    <p:sldId id="268" r:id="rId19"/>
+    <p:sldId id="269" r:id="rId20"/>
+    <p:sldId id="270" r:id="rId21"/>
   </p:sldIdLst>
   <p:sldSz cx="12188952" cy="6858000" type="screen4x3"/>
   <p:notesSz cx="6858000" cy="9144000"/>
@@ -4784,6 +4788,3078 @@
                 </a:solidFill>
               </a:rPr>
               <a:t>All other files unchanged from previous session</a:t>
+            </a:r>
+          </a:p>
+        </p:txBody>
+      </p:sp>
+    </p:spTree>
+  </p:cSld>
+  <p:clrMapOvr>
+    <a:masterClrMapping/>
+  </p:clrMapOvr>
+</p:sld>
+</file>
+
+<file path=ppt/slides/slide12.xml><?xml version="1.0" encoding="utf-8"?>
+<p:sld xmlns:a="http://schemas.openxmlformats.org/drawingml/2006/main" xmlns:p="http://schemas.openxmlformats.org/presentationml/2006/main" xmlns:r="http://schemas.openxmlformats.org/officeDocument/2006/relationships">
+  <p:cSld>
+    <p:spTree>
+      <p:nvGrpSpPr>
+        <p:cNvPr id="1" name=""/>
+        <p:cNvGrpSpPr/>
+        <p:nvPr/>
+      </p:nvGrpSpPr>
+      <p:grpSpPr/>
+      <p:sp>
+        <p:nvSpPr>
+          <p:cNvPr id="2" name="Rectangle 1"/>
+          <p:cNvSpPr/>
+          <p:nvPr/>
+        </p:nvSpPr>
+        <p:spPr>
+          <a:xfrm>
+            <a:off x="0" y="0"/>
+            <a:ext cx="12188952" cy="73152"/>
+          </a:xfrm>
+          <a:prstGeom prst="rect">
+            <a:avLst/>
+          </a:prstGeom>
+          <a:solidFill>
+            <a:srgbClr val="C8102E"/>
+          </a:solidFill>
+          <a:ln>
+            <a:noFill/>
+          </a:ln>
+        </p:spPr>
+        <p:style>
+          <a:lnRef idx="1">
+            <a:schemeClr val="accent1"/>
+          </a:lnRef>
+          <a:fillRef idx="3">
+            <a:schemeClr val="accent1"/>
+          </a:fillRef>
+          <a:effectRef idx="2">
+            <a:schemeClr val="accent1"/>
+          </a:effectRef>
+          <a:fontRef idx="minor">
+            <a:schemeClr val="lt1"/>
+          </a:fontRef>
+        </p:style>
+        <p:txBody>
+          <a:bodyPr rtlCol="0" anchor="ctr"/>
+          <a:lstStyle/>
+          <a:p>
+            <a:pPr algn="ctr"/>
+          </a:p>
+        </p:txBody>
+      </p:sp>
+      <p:sp>
+        <p:nvSpPr>
+          <p:cNvPr id="3" name="Rectangle 2"/>
+          <p:cNvSpPr/>
+          <p:nvPr/>
+        </p:nvSpPr>
+        <p:spPr>
+          <a:xfrm>
+            <a:off x="0" y="73152"/>
+            <a:ext cx="12188952" cy="6784848"/>
+          </a:xfrm>
+          <a:prstGeom prst="rect">
+            <a:avLst/>
+          </a:prstGeom>
+          <a:solidFill>
+            <a:srgbClr val="FAF6EF"/>
+          </a:solidFill>
+          <a:ln>
+            <a:noFill/>
+          </a:ln>
+        </p:spPr>
+        <p:style>
+          <a:lnRef idx="1">
+            <a:schemeClr val="accent1"/>
+          </a:lnRef>
+          <a:fillRef idx="3">
+            <a:schemeClr val="accent1"/>
+          </a:fillRef>
+          <a:effectRef idx="2">
+            <a:schemeClr val="accent1"/>
+          </a:effectRef>
+          <a:fontRef idx="minor">
+            <a:schemeClr val="lt1"/>
+          </a:fontRef>
+        </p:style>
+        <p:txBody>
+          <a:bodyPr rtlCol="0" anchor="ctr"/>
+          <a:lstStyle/>
+          <a:p>
+            <a:pPr algn="ctr"/>
+          </a:p>
+        </p:txBody>
+      </p:sp>
+      <p:sp>
+        <p:nvSpPr>
+          <p:cNvPr id="4" name="TextBox 3"/>
+          <p:cNvSpPr txBox="1"/>
+          <p:nvPr/>
+        </p:nvSpPr>
+        <p:spPr>
+          <a:xfrm>
+            <a:off x="457200" y="91152"/>
+            <a:ext cx="4000000" cy="320000"/>
+          </a:xfrm>
+          <a:prstGeom prst="rect">
+            <a:avLst/>
+          </a:prstGeom>
+          <a:noFill/>
+        </p:spPr>
+        <p:txBody>
+          <a:bodyPr wrap="square" lIns="0" rIns="0" tIns="0" bIns="0">
+            <a:spAutoFit/>
+          </a:bodyPr>
+          <a:lstStyle/>
+          <a:p>
+            <a:pPr algn="l"/>
+            <a:r>
+              <a:rPr sz="900" b="1">
+                <a:solidFill>
+                  <a:srgbClr val="C8102E"/>
+                </a:solidFill>
+              </a:rPr>
+              <a:t>SESSION 2  —  23 June 2026</a:t>
+            </a:r>
+          </a:p>
+        </p:txBody>
+      </p:sp>
+      <p:sp>
+        <p:nvSpPr>
+          <p:cNvPr id="5" name="TextBox 4"/>
+          <p:cNvSpPr txBox="1"/>
+          <p:nvPr/>
+        </p:nvSpPr>
+        <p:spPr>
+          <a:xfrm>
+            <a:off x="10931752" y="91152"/>
+            <a:ext cx="760000" cy="320000"/>
+          </a:xfrm>
+          <a:prstGeom prst="rect">
+            <a:avLst/>
+          </a:prstGeom>
+          <a:noFill/>
+        </p:spPr>
+        <p:txBody>
+          <a:bodyPr wrap="square" lIns="0" rIns="0" tIns="0" bIns="0">
+            <a:spAutoFit/>
+          </a:bodyPr>
+          <a:lstStyle/>
+          <a:p>
+            <a:pPr algn="r"/>
+            <a:r>
+              <a:rPr sz="900" b="0">
+                <a:solidFill>
+                  <a:srgbClr val="78716C"/>
+                </a:solidFill>
+              </a:rPr>
+              <a:t>12 / 15</a:t>
+            </a:r>
+          </a:p>
+        </p:txBody>
+      </p:sp>
+      <p:sp>
+        <p:nvSpPr>
+          <p:cNvPr id="6" name="TextBox 5"/>
+          <p:cNvSpPr txBox="1"/>
+          <p:nvPr/>
+        </p:nvSpPr>
+        <p:spPr>
+          <a:xfrm>
+            <a:off x="457200" y="228600"/>
+            <a:ext cx="11091672" cy="640080"/>
+          </a:xfrm>
+          <a:prstGeom prst="rect">
+            <a:avLst/>
+          </a:prstGeom>
+          <a:noFill/>
+        </p:spPr>
+        <p:txBody>
+          <a:bodyPr wrap="square" lIns="0" rIns="0" tIns="0" bIns="0">
+            <a:spAutoFit/>
+          </a:bodyPr>
+          <a:lstStyle/>
+          <a:p>
+            <a:pPr algn="l"/>
+            <a:r>
+              <a:rPr sz="2600" b="1">
+                <a:solidFill>
+                  <a:srgbClr val="1A1A1A"/>
+                </a:solidFill>
+              </a:rPr>
+              <a:t>Forecast Chart — Smooth Gradient Area Rebuild</a:t>
+            </a:r>
+          </a:p>
+        </p:txBody>
+      </p:sp>
+      <p:sp>
+        <p:nvSpPr>
+          <p:cNvPr id="7" name="Rectangle 6"/>
+          <p:cNvSpPr/>
+          <p:nvPr/>
+        </p:nvSpPr>
+        <p:spPr>
+          <a:xfrm>
+            <a:off x="457200" y="868680"/>
+            <a:ext cx="11274552" cy="36576"/>
+          </a:xfrm>
+          <a:prstGeom prst="rect">
+            <a:avLst/>
+          </a:prstGeom>
+          <a:solidFill>
+            <a:srgbClr val="C8102E"/>
+          </a:solidFill>
+          <a:ln>
+            <a:noFill/>
+          </a:ln>
+        </p:spPr>
+        <p:style>
+          <a:lnRef idx="1">
+            <a:schemeClr val="accent1"/>
+          </a:lnRef>
+          <a:fillRef idx="3">
+            <a:schemeClr val="accent1"/>
+          </a:fillRef>
+          <a:effectRef idx="2">
+            <a:schemeClr val="accent1"/>
+          </a:effectRef>
+          <a:fontRef idx="minor">
+            <a:schemeClr val="lt1"/>
+          </a:fontRef>
+        </p:style>
+        <p:txBody>
+          <a:bodyPr rtlCol="0" anchor="ctr"/>
+          <a:lstStyle/>
+          <a:p>
+            <a:pPr algn="ctr"/>
+          </a:p>
+        </p:txBody>
+      </p:sp>
+      <p:sp>
+        <p:nvSpPr>
+          <p:cNvPr id="8" name="TextBox 7"/>
+          <p:cNvSpPr txBox="1"/>
+          <p:nvPr/>
+        </p:nvSpPr>
+        <p:spPr>
+          <a:xfrm>
+            <a:off x="457200" y="1097280"/>
+            <a:ext cx="11091672" cy="365760"/>
+          </a:xfrm>
+          <a:prstGeom prst="rect">
+            <a:avLst/>
+          </a:prstGeom>
+          <a:noFill/>
+        </p:spPr>
+        <p:txBody>
+          <a:bodyPr wrap="square" lIns="0" rIns="0" tIns="0" bIns="0">
+            <a:spAutoFit/>
+          </a:bodyPr>
+          <a:lstStyle/>
+          <a:p>
+            <a:pPr algn="l"/>
+            <a:r>
+              <a:rPr sz="1400" b="1">
+                <a:solidFill>
+                  <a:srgbClr val="C8102E"/>
+                </a:solidFill>
+              </a:rPr>
+              <a:t>Before</a:t>
+            </a:r>
+          </a:p>
+        </p:txBody>
+      </p:sp>
+      <p:sp>
+        <p:nvSpPr>
+          <p:cNvPr id="9" name="TextBox 8"/>
+          <p:cNvSpPr txBox="1"/>
+          <p:nvPr/>
+        </p:nvSpPr>
+        <p:spPr>
+          <a:xfrm>
+            <a:off x="640080" y="1463040"/>
+            <a:ext cx="10908792" cy="285750"/>
+          </a:xfrm>
+          <a:prstGeom prst="rect">
+            <a:avLst/>
+          </a:prstGeom>
+          <a:noFill/>
+        </p:spPr>
+        <p:txBody>
+          <a:bodyPr wrap="square" lIns="0" rIns="0" tIns="0" bIns="0">
+            <a:spAutoFit/>
+          </a:bodyPr>
+          <a:lstStyle/>
+          <a:p>
+            <a:pPr algn="l"/>
+            <a:r>
+              <a:rPr sz="1200" b="0">
+                <a:solidFill>
+                  <a:srgbClr val="1A1A1A"/>
+                </a:solidFill>
+              </a:rPr>
+              <a:t>▪  Flat coloured bars with no visual hierarchy — movement looked identical week-to-week</a:t>
+            </a:r>
+          </a:p>
+        </p:txBody>
+      </p:sp>
+      <p:sp>
+        <p:nvSpPr>
+          <p:cNvPr id="10" name="TextBox 9"/>
+          <p:cNvSpPr txBox="1"/>
+          <p:nvPr/>
+        </p:nvSpPr>
+        <p:spPr>
+          <a:xfrm>
+            <a:off x="640080" y="1748790"/>
+            <a:ext cx="10908792" cy="285750"/>
+          </a:xfrm>
+          <a:prstGeom prst="rect">
+            <a:avLst/>
+          </a:prstGeom>
+          <a:noFill/>
+        </p:spPr>
+        <p:txBody>
+          <a:bodyPr wrap="square" lIns="0" rIns="0" tIns="0" bIns="0">
+            <a:spAutoFit/>
+          </a:bodyPr>
+          <a:lstStyle/>
+          <a:p>
+            <a:pPr algn="l"/>
+            <a:r>
+              <a:rPr sz="1200" b="0">
+                <a:solidFill>
+                  <a:srgbClr val="1A1A1A"/>
+                </a:solidFill>
+              </a:rPr>
+              <a:t>▪  Chart axis started at zero, compressing weekly swings to near-invisible deltas</a:t>
+            </a:r>
+          </a:p>
+        </p:txBody>
+      </p:sp>
+      <p:sp>
+        <p:nvSpPr>
+          <p:cNvPr id="11" name="TextBox 10"/>
+          <p:cNvSpPr txBox="1"/>
+          <p:nvPr/>
+        </p:nvSpPr>
+        <p:spPr>
+          <a:xfrm>
+            <a:off x="640080" y="2034540"/>
+            <a:ext cx="10908792" cy="285750"/>
+          </a:xfrm>
+          <a:prstGeom prst="rect">
+            <a:avLst/>
+          </a:prstGeom>
+          <a:noFill/>
+        </p:spPr>
+        <p:txBody>
+          <a:bodyPr wrap="square" lIns="0" rIns="0" tIns="0" bIns="0">
+            <a:spAutoFit/>
+          </a:bodyPr>
+          <a:lstStyle/>
+          <a:p>
+            <a:pPr algn="l"/>
+            <a:r>
+              <a:rPr sz="1200" b="0">
+                <a:solidFill>
+                  <a:srgbClr val="1A1A1A"/>
+                </a:solidFill>
+              </a:rPr>
+              <a:t>▪  No event markers; no distinction between inflow weeks and outflow weeks</a:t>
+            </a:r>
+          </a:p>
+        </p:txBody>
+      </p:sp>
+      <p:sp>
+        <p:nvSpPr>
+          <p:cNvPr id="12" name="TextBox 11"/>
+          <p:cNvSpPr txBox="1"/>
+          <p:nvPr/>
+        </p:nvSpPr>
+        <p:spPr>
+          <a:xfrm>
+            <a:off x="640080" y="2320290"/>
+            <a:ext cx="10908792" cy="285750"/>
+          </a:xfrm>
+          <a:prstGeom prst="rect">
+            <a:avLst/>
+          </a:prstGeom>
+          <a:noFill/>
+        </p:spPr>
+        <p:txBody>
+          <a:bodyPr wrap="square" lIns="0" rIns="0" tIns="0" bIns="0">
+            <a:spAutoFit/>
+          </a:bodyPr>
+          <a:lstStyle/>
+          <a:p>
+            <a:pPr algn="l"/>
+            <a:r>
+              <a:rPr sz="1200" b="0">
+                <a:solidFill>
+                  <a:srgbClr val="1A1A1A"/>
+                </a:solidFill>
+              </a:rPr>
+              <a:t>▪  Amber floor warning (£80k) never triggered because the scale hid dips</a:t>
+            </a:r>
+          </a:p>
+        </p:txBody>
+      </p:sp>
+      <p:sp>
+        <p:nvSpPr>
+          <p:cNvPr id="13" name="TextBox 12"/>
+          <p:cNvSpPr txBox="1"/>
+          <p:nvPr/>
+        </p:nvSpPr>
+        <p:spPr>
+          <a:xfrm>
+            <a:off x="457200" y="2679192"/>
+            <a:ext cx="11091672" cy="365760"/>
+          </a:xfrm>
+          <a:prstGeom prst="rect">
+            <a:avLst/>
+          </a:prstGeom>
+          <a:noFill/>
+        </p:spPr>
+        <p:txBody>
+          <a:bodyPr wrap="square" lIns="0" rIns="0" tIns="0" bIns="0">
+            <a:spAutoFit/>
+          </a:bodyPr>
+          <a:lstStyle/>
+          <a:p>
+            <a:pPr algn="l"/>
+            <a:r>
+              <a:rPr sz="1400" b="1">
+                <a:solidFill>
+                  <a:srgbClr val="C8102E"/>
+                </a:solidFill>
+              </a:rPr>
+              <a:t>After</a:t>
+            </a:r>
+          </a:p>
+        </p:txBody>
+      </p:sp>
+      <p:sp>
+        <p:nvSpPr>
+          <p:cNvPr id="14" name="TextBox 13"/>
+          <p:cNvSpPr txBox="1"/>
+          <p:nvPr/>
+        </p:nvSpPr>
+        <p:spPr>
+          <a:xfrm>
+            <a:off x="640080" y="3044952"/>
+            <a:ext cx="10908792" cy="285750"/>
+          </a:xfrm>
+          <a:prstGeom prst="rect">
+            <a:avLst/>
+          </a:prstGeom>
+          <a:noFill/>
+        </p:spPr>
+        <p:txBody>
+          <a:bodyPr wrap="square" lIns="0" rIns="0" tIns="0" bIns="0">
+            <a:spAutoFit/>
+          </a:bodyPr>
+          <a:lstStyle/>
+          <a:p>
+            <a:pPr algn="l"/>
+            <a:r>
+              <a:rPr sz="1200" b="0">
+                <a:solidFill>
+                  <a:srgbClr val="1A1A1A"/>
+                </a:solidFill>
+              </a:rPr>
+              <a:t>▪  Smooth area chart using Catmull-Rom → cubic Bézier conversion for a natural curve</a:t>
+            </a:r>
+          </a:p>
+        </p:txBody>
+      </p:sp>
+      <p:sp>
+        <p:nvSpPr>
+          <p:cNvPr id="15" name="TextBox 14"/>
+          <p:cNvSpPr txBox="1"/>
+          <p:nvPr/>
+        </p:nvSpPr>
+        <p:spPr>
+          <a:xfrm>
+            <a:off x="640080" y="3330702"/>
+            <a:ext cx="10908792" cy="285750"/>
+          </a:xfrm>
+          <a:prstGeom prst="rect">
+            <a:avLst/>
+          </a:prstGeom>
+          <a:noFill/>
+        </p:spPr>
+        <p:txBody>
+          <a:bodyPr wrap="square" lIns="0" rIns="0" tIns="0" bIns="0">
+            <a:spAutoFit/>
+          </a:bodyPr>
+          <a:lstStyle/>
+          <a:p>
+            <a:pPr algn="l"/>
+            <a:r>
+              <a:rPr sz="1200" b="0">
+                <a:solidFill>
+                  <a:srgbClr val="1A1A1A"/>
+                </a:solidFill>
+              </a:rPr>
+              <a:t>▪  Y-axis zoomed to actual [min, max] balance band (+35% padding) — weekly movement is now legible</a:t>
+            </a:r>
+          </a:p>
+        </p:txBody>
+      </p:sp>
+      <p:sp>
+        <p:nvSpPr>
+          <p:cNvPr id="16" name="TextBox 15"/>
+          <p:cNvSpPr txBox="1"/>
+          <p:nvPr/>
+        </p:nvSpPr>
+        <p:spPr>
+          <a:xfrm>
+            <a:off x="640080" y="3616452"/>
+            <a:ext cx="10908792" cy="285750"/>
+          </a:xfrm>
+          <a:prstGeom prst="rect">
+            <a:avLst/>
+          </a:prstGeom>
+          <a:noFill/>
+        </p:spPr>
+        <p:txBody>
+          <a:bodyPr wrap="square" lIns="0" rIns="0" tIns="0" bIns="0">
+            <a:spAutoFit/>
+          </a:bodyPr>
+          <a:lstStyle/>
+          <a:p>
+            <a:pPr algn="l"/>
+            <a:r>
+              <a:rPr sz="1200" b="0">
+                <a:solidFill>
+                  <a:srgbClr val="1A1A1A"/>
+                </a:solidFill>
+              </a:rPr>
+              <a:t>▪  Event markers: red dot = largest outflow, rose dot = inflow, amber ring = lowest week</a:t>
+            </a:r>
+          </a:p>
+        </p:txBody>
+      </p:sp>
+      <p:sp>
+        <p:nvSpPr>
+          <p:cNvPr id="17" name="TextBox 16"/>
+          <p:cNvSpPr txBox="1"/>
+          <p:nvPr/>
+        </p:nvSpPr>
+        <p:spPr>
+          <a:xfrm>
+            <a:off x="640080" y="3902202"/>
+            <a:ext cx="10908792" cy="285750"/>
+          </a:xfrm>
+          <a:prstGeom prst="rect">
+            <a:avLst/>
+          </a:prstGeom>
+          <a:noFill/>
+        </p:spPr>
+        <p:txBody>
+          <a:bodyPr wrap="square" lIns="0" rIns="0" tIns="0" bIns="0">
+            <a:spAutoFit/>
+          </a:bodyPr>
+          <a:lstStyle/>
+          <a:p>
+            <a:pPr algn="l"/>
+            <a:r>
+              <a:rPr sz="1200" b="0">
+                <a:solidFill>
+                  <a:srgbClr val="1A1A1A"/>
+                </a:solidFill>
+              </a:rPr>
+              <a:t>▪  Event text block names the dominant scheduled outflow (e.g. 'VAT direct debit £41,614')</a:t>
+            </a:r>
+          </a:p>
+        </p:txBody>
+      </p:sp>
+      <p:sp>
+        <p:nvSpPr>
+          <p:cNvPr id="18" name="TextBox 17"/>
+          <p:cNvSpPr txBox="1"/>
+          <p:nvPr/>
+        </p:nvSpPr>
+        <p:spPr>
+          <a:xfrm>
+            <a:off x="640080" y="4187952"/>
+            <a:ext cx="10908792" cy="285750"/>
+          </a:xfrm>
+          <a:prstGeom prst="rect">
+            <a:avLst/>
+          </a:prstGeom>
+          <a:noFill/>
+        </p:spPr>
+        <p:txBody>
+          <a:bodyPr wrap="square" lIns="0" rIns="0" tIns="0" bIns="0">
+            <a:spAutoFit/>
+          </a:bodyPr>
+          <a:lstStyle/>
+          <a:p>
+            <a:pPr algn="l"/>
+            <a:r>
+              <a:rPr sz="1200" b="0">
+                <a:solidFill>
+                  <a:srgbClr val="1A1A1A"/>
+                </a:solidFill>
+              </a:rPr>
+              <a:t>▪  Amber warning fires when balance dips below the £80k floor</a:t>
+            </a:r>
+          </a:p>
+        </p:txBody>
+      </p:sp>
+      <p:sp>
+        <p:nvSpPr>
+          <p:cNvPr id="19" name="TextBox 18"/>
+          <p:cNvSpPr txBox="1"/>
+          <p:nvPr/>
+        </p:nvSpPr>
+        <p:spPr>
+          <a:xfrm>
+            <a:off x="457200" y="4546854"/>
+            <a:ext cx="11091672" cy="365760"/>
+          </a:xfrm>
+          <a:prstGeom prst="rect">
+            <a:avLst/>
+          </a:prstGeom>
+          <a:noFill/>
+        </p:spPr>
+        <p:txBody>
+          <a:bodyPr wrap="square" lIns="0" rIns="0" tIns="0" bIns="0">
+            <a:spAutoFit/>
+          </a:bodyPr>
+          <a:lstStyle/>
+          <a:p>
+            <a:pPr algn="l"/>
+            <a:r>
+              <a:rPr sz="1400" b="1">
+                <a:solidFill>
+                  <a:srgbClr val="C8102E"/>
+                </a:solidFill>
+              </a:rPr>
+              <a:t>Why it matters</a:t>
+            </a:r>
+          </a:p>
+        </p:txBody>
+      </p:sp>
+      <p:sp>
+        <p:nvSpPr>
+          <p:cNvPr id="20" name="TextBox 19"/>
+          <p:cNvSpPr txBox="1"/>
+          <p:nvPr/>
+        </p:nvSpPr>
+        <p:spPr>
+          <a:xfrm>
+            <a:off x="640080" y="4912614"/>
+            <a:ext cx="10908792" cy="285750"/>
+          </a:xfrm>
+          <a:prstGeom prst="rect">
+            <a:avLst/>
+          </a:prstGeom>
+          <a:noFill/>
+        </p:spPr>
+        <p:txBody>
+          <a:bodyPr wrap="square" lIns="0" rIns="0" tIns="0" bIns="0">
+            <a:spAutoFit/>
+          </a:bodyPr>
+          <a:lstStyle/>
+          <a:p>
+            <a:pPr algn="l"/>
+            <a:r>
+              <a:rPr sz="1200" b="0">
+                <a:solidFill>
+                  <a:srgbClr val="1A1A1A"/>
+                </a:solidFill>
+              </a:rPr>
+              <a:t>▪  A cash-flow chart that looks flat communicates nothing. The rebuild makes variance immediately visible</a:t>
+            </a:r>
+          </a:p>
+        </p:txBody>
+      </p:sp>
+      <p:sp>
+        <p:nvSpPr>
+          <p:cNvPr id="21" name="TextBox 20"/>
+          <p:cNvSpPr txBox="1"/>
+          <p:nvPr/>
+        </p:nvSpPr>
+        <p:spPr>
+          <a:xfrm>
+            <a:off x="640080" y="5198364"/>
+            <a:ext cx="10908792" cy="285750"/>
+          </a:xfrm>
+          <a:prstGeom prst="rect">
+            <a:avLst/>
+          </a:prstGeom>
+          <a:noFill/>
+        </p:spPr>
+        <p:txBody>
+          <a:bodyPr wrap="square" lIns="0" rIns="0" tIns="0" bIns="0">
+            <a:spAutoFit/>
+          </a:bodyPr>
+          <a:lstStyle/>
+          <a:p>
+            <a:pPr algn="l"/>
+            <a:r>
+              <a:rPr sz="1200" b="0">
+                <a:solidFill>
+                  <a:srgbClr val="1A1A1A"/>
+                </a:solidFill>
+              </a:rPr>
+              <a:t>▪  and gives the SME owner one named event to act on — the core job of a forecast widget.</a:t>
+            </a:r>
+          </a:p>
+        </p:txBody>
+      </p:sp>
+      <p:sp>
+        <p:nvSpPr>
+          <p:cNvPr id="22" name="Rectangle 21"/>
+          <p:cNvSpPr/>
+          <p:nvPr/>
+        </p:nvSpPr>
+        <p:spPr>
+          <a:xfrm>
+            <a:off x="457200" y="6217920"/>
+            <a:ext cx="11274552" cy="457200"/>
+          </a:xfrm>
+          <a:prstGeom prst="rect">
+            <a:avLst/>
+          </a:prstGeom>
+          <a:solidFill>
+            <a:srgbClr val="F5F0E8"/>
+          </a:solidFill>
+          <a:ln>
+            <a:noFill/>
+          </a:ln>
+        </p:spPr>
+        <p:style>
+          <a:lnRef idx="1">
+            <a:schemeClr val="accent1"/>
+          </a:lnRef>
+          <a:fillRef idx="3">
+            <a:schemeClr val="accent1"/>
+          </a:fillRef>
+          <a:effectRef idx="2">
+            <a:schemeClr val="accent1"/>
+          </a:effectRef>
+          <a:fontRef idx="minor">
+            <a:schemeClr val="lt1"/>
+          </a:fontRef>
+        </p:style>
+        <p:txBody>
+          <a:bodyPr rtlCol="0" anchor="ctr"/>
+          <a:lstStyle/>
+          <a:p>
+            <a:pPr algn="ctr"/>
+          </a:p>
+        </p:txBody>
+      </p:sp>
+      <p:sp>
+        <p:nvSpPr>
+          <p:cNvPr id="23" name="TextBox 22"/>
+          <p:cNvSpPr txBox="1"/>
+          <p:nvPr/>
+        </p:nvSpPr>
+        <p:spPr>
+          <a:xfrm>
+            <a:off x="640080" y="6263640"/>
+            <a:ext cx="11091672" cy="365760"/>
+          </a:xfrm>
+          <a:prstGeom prst="rect">
+            <a:avLst/>
+          </a:prstGeom>
+          <a:noFill/>
+        </p:spPr>
+        <p:txBody>
+          <a:bodyPr wrap="square" lIns="0" rIns="0" tIns="0" bIns="0">
+            <a:spAutoFit/>
+          </a:bodyPr>
+          <a:lstStyle/>
+          <a:p>
+            <a:pPr algn="l"/>
+            <a:r>
+              <a:rPr sz="1000" b="0">
+                <a:solidFill>
+                  <a:srgbClr val="78716C"/>
+                </a:solidFill>
+              </a:rPr>
+              <a:t>Session 2 · 23 Jun 2026  ·  forecast useMemo ~line 609, render block ~line 3207</a:t>
+            </a:r>
+          </a:p>
+        </p:txBody>
+      </p:sp>
+    </p:spTree>
+  </p:cSld>
+  <p:clrMapOvr>
+    <a:masterClrMapping/>
+  </p:clrMapOvr>
+</p:sld>
+</file>
+
+<file path=ppt/slides/slide13.xml><?xml version="1.0" encoding="utf-8"?>
+<p:sld xmlns:a="http://schemas.openxmlformats.org/drawingml/2006/main" xmlns:p="http://schemas.openxmlformats.org/presentationml/2006/main" xmlns:r="http://schemas.openxmlformats.org/officeDocument/2006/relationships">
+  <p:cSld>
+    <p:spTree>
+      <p:nvGrpSpPr>
+        <p:cNvPr id="1" name=""/>
+        <p:cNvGrpSpPr/>
+        <p:nvPr/>
+      </p:nvGrpSpPr>
+      <p:grpSpPr/>
+      <p:sp>
+        <p:nvSpPr>
+          <p:cNvPr id="2" name="Rectangle 1"/>
+          <p:cNvSpPr/>
+          <p:nvPr/>
+        </p:nvSpPr>
+        <p:spPr>
+          <a:xfrm>
+            <a:off x="0" y="0"/>
+            <a:ext cx="12188952" cy="73152"/>
+          </a:xfrm>
+          <a:prstGeom prst="rect">
+            <a:avLst/>
+          </a:prstGeom>
+          <a:solidFill>
+            <a:srgbClr val="C8102E"/>
+          </a:solidFill>
+          <a:ln>
+            <a:noFill/>
+          </a:ln>
+        </p:spPr>
+        <p:style>
+          <a:lnRef idx="1">
+            <a:schemeClr val="accent1"/>
+          </a:lnRef>
+          <a:fillRef idx="3">
+            <a:schemeClr val="accent1"/>
+          </a:fillRef>
+          <a:effectRef idx="2">
+            <a:schemeClr val="accent1"/>
+          </a:effectRef>
+          <a:fontRef idx="minor">
+            <a:schemeClr val="lt1"/>
+          </a:fontRef>
+        </p:style>
+        <p:txBody>
+          <a:bodyPr rtlCol="0" anchor="ctr"/>
+          <a:lstStyle/>
+          <a:p>
+            <a:pPr algn="ctr"/>
+          </a:p>
+        </p:txBody>
+      </p:sp>
+      <p:sp>
+        <p:nvSpPr>
+          <p:cNvPr id="3" name="Rectangle 2"/>
+          <p:cNvSpPr/>
+          <p:nvPr/>
+        </p:nvSpPr>
+        <p:spPr>
+          <a:xfrm>
+            <a:off x="0" y="73152"/>
+            <a:ext cx="12188952" cy="6784848"/>
+          </a:xfrm>
+          <a:prstGeom prst="rect">
+            <a:avLst/>
+          </a:prstGeom>
+          <a:solidFill>
+            <a:srgbClr val="FAF6EF"/>
+          </a:solidFill>
+          <a:ln>
+            <a:noFill/>
+          </a:ln>
+        </p:spPr>
+        <p:style>
+          <a:lnRef idx="1">
+            <a:schemeClr val="accent1"/>
+          </a:lnRef>
+          <a:fillRef idx="3">
+            <a:schemeClr val="accent1"/>
+          </a:fillRef>
+          <a:effectRef idx="2">
+            <a:schemeClr val="accent1"/>
+          </a:effectRef>
+          <a:fontRef idx="minor">
+            <a:schemeClr val="lt1"/>
+          </a:fontRef>
+        </p:style>
+        <p:txBody>
+          <a:bodyPr rtlCol="0" anchor="ctr"/>
+          <a:lstStyle/>
+          <a:p>
+            <a:pPr algn="ctr"/>
+          </a:p>
+        </p:txBody>
+      </p:sp>
+      <p:sp>
+        <p:nvSpPr>
+          <p:cNvPr id="4" name="TextBox 3"/>
+          <p:cNvSpPr txBox="1"/>
+          <p:nvPr/>
+        </p:nvSpPr>
+        <p:spPr>
+          <a:xfrm>
+            <a:off x="457200" y="91152"/>
+            <a:ext cx="4000000" cy="320000"/>
+          </a:xfrm>
+          <a:prstGeom prst="rect">
+            <a:avLst/>
+          </a:prstGeom>
+          <a:noFill/>
+        </p:spPr>
+        <p:txBody>
+          <a:bodyPr wrap="square" lIns="0" rIns="0" tIns="0" bIns="0">
+            <a:spAutoFit/>
+          </a:bodyPr>
+          <a:lstStyle/>
+          <a:p>
+            <a:pPr algn="l"/>
+            <a:r>
+              <a:rPr sz="900" b="1">
+                <a:solidFill>
+                  <a:srgbClr val="C8102E"/>
+                </a:solidFill>
+              </a:rPr>
+              <a:t>SESSION 2  —  23 June 2026</a:t>
+            </a:r>
+          </a:p>
+        </p:txBody>
+      </p:sp>
+      <p:sp>
+        <p:nvSpPr>
+          <p:cNvPr id="5" name="TextBox 4"/>
+          <p:cNvSpPr txBox="1"/>
+          <p:nvPr/>
+        </p:nvSpPr>
+        <p:spPr>
+          <a:xfrm>
+            <a:off x="10931752" y="91152"/>
+            <a:ext cx="760000" cy="320000"/>
+          </a:xfrm>
+          <a:prstGeom prst="rect">
+            <a:avLst/>
+          </a:prstGeom>
+          <a:noFill/>
+        </p:spPr>
+        <p:txBody>
+          <a:bodyPr wrap="square" lIns="0" rIns="0" tIns="0" bIns="0">
+            <a:spAutoFit/>
+          </a:bodyPr>
+          <a:lstStyle/>
+          <a:p>
+            <a:pPr algn="r"/>
+            <a:r>
+              <a:rPr sz="900" b="0">
+                <a:solidFill>
+                  <a:srgbClr val="78716C"/>
+                </a:solidFill>
+              </a:rPr>
+              <a:t>13 / 15</a:t>
+            </a:r>
+          </a:p>
+        </p:txBody>
+      </p:sp>
+      <p:sp>
+        <p:nvSpPr>
+          <p:cNvPr id="6" name="TextBox 5"/>
+          <p:cNvSpPr txBox="1"/>
+          <p:nvPr/>
+        </p:nvSpPr>
+        <p:spPr>
+          <a:xfrm>
+            <a:off x="457200" y="228600"/>
+            <a:ext cx="11091672" cy="640080"/>
+          </a:xfrm>
+          <a:prstGeom prst="rect">
+            <a:avLst/>
+          </a:prstGeom>
+          <a:noFill/>
+        </p:spPr>
+        <p:txBody>
+          <a:bodyPr wrap="square" lIns="0" rIns="0" tIns="0" bIns="0">
+            <a:spAutoFit/>
+          </a:bodyPr>
+          <a:lstStyle/>
+          <a:p>
+            <a:pPr algn="l"/>
+            <a:r>
+              <a:rPr sz="2600" b="1">
+                <a:solidFill>
+                  <a:srgbClr val="1A1A1A"/>
+                </a:solidFill>
+              </a:rPr>
+              <a:t>Card Buttons — Visual Hierarchy Polish</a:t>
+            </a:r>
+          </a:p>
+        </p:txBody>
+      </p:sp>
+      <p:sp>
+        <p:nvSpPr>
+          <p:cNvPr id="7" name="Rectangle 6"/>
+          <p:cNvSpPr/>
+          <p:nvPr/>
+        </p:nvSpPr>
+        <p:spPr>
+          <a:xfrm>
+            <a:off x="457200" y="868680"/>
+            <a:ext cx="11274552" cy="36576"/>
+          </a:xfrm>
+          <a:prstGeom prst="rect">
+            <a:avLst/>
+          </a:prstGeom>
+          <a:solidFill>
+            <a:srgbClr val="C8102E"/>
+          </a:solidFill>
+          <a:ln>
+            <a:noFill/>
+          </a:ln>
+        </p:spPr>
+        <p:style>
+          <a:lnRef idx="1">
+            <a:schemeClr val="accent1"/>
+          </a:lnRef>
+          <a:fillRef idx="3">
+            <a:schemeClr val="accent1"/>
+          </a:fillRef>
+          <a:effectRef idx="2">
+            <a:schemeClr val="accent1"/>
+          </a:effectRef>
+          <a:fontRef idx="minor">
+            <a:schemeClr val="lt1"/>
+          </a:fontRef>
+        </p:style>
+        <p:txBody>
+          <a:bodyPr rtlCol="0" anchor="ctr"/>
+          <a:lstStyle/>
+          <a:p>
+            <a:pPr algn="ctr"/>
+          </a:p>
+        </p:txBody>
+      </p:sp>
+      <p:sp>
+        <p:nvSpPr>
+          <p:cNvPr id="8" name="TextBox 7"/>
+          <p:cNvSpPr txBox="1"/>
+          <p:nvPr/>
+        </p:nvSpPr>
+        <p:spPr>
+          <a:xfrm>
+            <a:off x="457200" y="1097280"/>
+            <a:ext cx="11091672" cy="365760"/>
+          </a:xfrm>
+          <a:prstGeom prst="rect">
+            <a:avLst/>
+          </a:prstGeom>
+          <a:noFill/>
+        </p:spPr>
+        <p:txBody>
+          <a:bodyPr wrap="square" lIns="0" rIns="0" tIns="0" bIns="0">
+            <a:spAutoFit/>
+          </a:bodyPr>
+          <a:lstStyle/>
+          <a:p>
+            <a:pPr algn="l"/>
+            <a:r>
+              <a:rPr sz="1400" b="1">
+                <a:solidFill>
+                  <a:srgbClr val="C8102E"/>
+                </a:solidFill>
+              </a:rPr>
+              <a:t>Before</a:t>
+            </a:r>
+          </a:p>
+        </p:txBody>
+      </p:sp>
+      <p:sp>
+        <p:nvSpPr>
+          <p:cNvPr id="9" name="TextBox 8"/>
+          <p:cNvSpPr txBox="1"/>
+          <p:nvPr/>
+        </p:nvSpPr>
+        <p:spPr>
+          <a:xfrm>
+            <a:off x="640080" y="1463040"/>
+            <a:ext cx="10908792" cy="285750"/>
+          </a:xfrm>
+          <a:prstGeom prst="rect">
+            <a:avLst/>
+          </a:prstGeom>
+          <a:noFill/>
+        </p:spPr>
+        <p:txBody>
+          <a:bodyPr wrap="square" lIns="0" rIns="0" tIns="0" bIns="0">
+            <a:spAutoFit/>
+          </a:bodyPr>
+          <a:lstStyle/>
+          <a:p>
+            <a:pPr algn="l"/>
+            <a:r>
+              <a:rPr sz="1200" b="0">
+                <a:solidFill>
+                  <a:srgbClr val="1A1A1A"/>
+                </a:solidFill>
+              </a:rPr>
+              <a:t>▪  Two ghost buttons ("View PIN" and "Freeze") with identical weight and styling</a:t>
+            </a:r>
+          </a:p>
+        </p:txBody>
+      </p:sp>
+      <p:sp>
+        <p:nvSpPr>
+          <p:cNvPr id="10" name="TextBox 9"/>
+          <p:cNvSpPr txBox="1"/>
+          <p:nvPr/>
+        </p:nvSpPr>
+        <p:spPr>
+          <a:xfrm>
+            <a:off x="640080" y="1748790"/>
+            <a:ext cx="10908792" cy="285750"/>
+          </a:xfrm>
+          <a:prstGeom prst="rect">
+            <a:avLst/>
+          </a:prstGeom>
+          <a:noFill/>
+        </p:spPr>
+        <p:txBody>
+          <a:bodyPr wrap="square" lIns="0" rIns="0" tIns="0" bIns="0">
+            <a:spAutoFit/>
+          </a:bodyPr>
+          <a:lstStyle/>
+          <a:p>
+            <a:pPr algn="l"/>
+            <a:r>
+              <a:rPr sz="1200" b="0">
+                <a:solidFill>
+                  <a:srgbClr val="1A1A1A"/>
+                </a:solidFill>
+              </a:rPr>
+              <a:t>▪  No visual signal to distinguish a read-only action from a destructive one</a:t>
+            </a:r>
+          </a:p>
+        </p:txBody>
+      </p:sp>
+      <p:sp>
+        <p:nvSpPr>
+          <p:cNvPr id="11" name="TextBox 10"/>
+          <p:cNvSpPr txBox="1"/>
+          <p:nvPr/>
+        </p:nvSpPr>
+        <p:spPr>
+          <a:xfrm>
+            <a:off x="640080" y="2034540"/>
+            <a:ext cx="10908792" cy="285750"/>
+          </a:xfrm>
+          <a:prstGeom prst="rect">
+            <a:avLst/>
+          </a:prstGeom>
+          <a:noFill/>
+        </p:spPr>
+        <p:txBody>
+          <a:bodyPr wrap="square" lIns="0" rIns="0" tIns="0" bIns="0">
+            <a:spAutoFit/>
+          </a:bodyPr>
+          <a:lstStyle/>
+          <a:p>
+            <a:pPr algn="l"/>
+            <a:r>
+              <a:rPr sz="1200" b="0">
+                <a:solidFill>
+                  <a:srgbClr val="1A1A1A"/>
+                </a:solidFill>
+              </a:rPr>
+              <a:t>▪  "Unfreeze" used the same ghost style as the initial Freeze button</a:t>
+            </a:r>
+          </a:p>
+        </p:txBody>
+      </p:sp>
+      <p:sp>
+        <p:nvSpPr>
+          <p:cNvPr id="12" name="TextBox 11"/>
+          <p:cNvSpPr txBox="1"/>
+          <p:nvPr/>
+        </p:nvSpPr>
+        <p:spPr>
+          <a:xfrm>
+            <a:off x="457200" y="2393442"/>
+            <a:ext cx="11091672" cy="365760"/>
+          </a:xfrm>
+          <a:prstGeom prst="rect">
+            <a:avLst/>
+          </a:prstGeom>
+          <a:noFill/>
+        </p:spPr>
+        <p:txBody>
+          <a:bodyPr wrap="square" lIns="0" rIns="0" tIns="0" bIns="0">
+            <a:spAutoFit/>
+          </a:bodyPr>
+          <a:lstStyle/>
+          <a:p>
+            <a:pPr algn="l"/>
+            <a:r>
+              <a:rPr sz="1400" b="1">
+                <a:solidFill>
+                  <a:srgbClr val="C8102E"/>
+                </a:solidFill>
+              </a:rPr>
+              <a:t>After</a:t>
+            </a:r>
+          </a:p>
+        </p:txBody>
+      </p:sp>
+      <p:sp>
+        <p:nvSpPr>
+          <p:cNvPr id="13" name="TextBox 12"/>
+          <p:cNvSpPr txBox="1"/>
+          <p:nvPr/>
+        </p:nvSpPr>
+        <p:spPr>
+          <a:xfrm>
+            <a:off x="640080" y="2759202"/>
+            <a:ext cx="10908792" cy="285750"/>
+          </a:xfrm>
+          <a:prstGeom prst="rect">
+            <a:avLst/>
+          </a:prstGeom>
+          <a:noFill/>
+        </p:spPr>
+        <p:txBody>
+          <a:bodyPr wrap="square" lIns="0" rIns="0" tIns="0" bIns="0">
+            <a:spAutoFit/>
+          </a:bodyPr>
+          <a:lstStyle/>
+          <a:p>
+            <a:pPr algn="l"/>
+            <a:r>
+              <a:rPr sz="1200" b="0">
+                <a:solidFill>
+                  <a:srgbClr val="1A1A1A"/>
+                </a:solidFill>
+              </a:rPr>
+              <a:t>▪  "View PIN" — visible ghost: stone-50 background, stone-300 border, stone-800 text</a:t>
+            </a:r>
+          </a:p>
+        </p:txBody>
+      </p:sp>
+      <p:sp>
+        <p:nvSpPr>
+          <p:cNvPr id="14" name="TextBox 13"/>
+          <p:cNvSpPr txBox="1"/>
+          <p:nvPr/>
+        </p:nvSpPr>
+        <p:spPr>
+          <a:xfrm>
+            <a:off x="640080" y="3044952"/>
+            <a:ext cx="10908792" cy="285750"/>
+          </a:xfrm>
+          <a:prstGeom prst="rect">
+            <a:avLst/>
+          </a:prstGeom>
+          <a:noFill/>
+        </p:spPr>
+        <p:txBody>
+          <a:bodyPr wrap="square" lIns="0" rIns="0" tIns="0" bIns="0">
+            <a:spAutoFit/>
+          </a:bodyPr>
+          <a:lstStyle/>
+          <a:p>
+            <a:pPr algn="l"/>
+            <a:r>
+              <a:rPr sz="1200" b="0">
+                <a:solidFill>
+                  <a:srgbClr val="1A1A1A"/>
+                </a:solidFill>
+              </a:rPr>
+              <a:t>▪  "Freeze" — solid stone-900 fill (filled black), communicating a serious / committed action</a:t>
+            </a:r>
+          </a:p>
+        </p:txBody>
+      </p:sp>
+      <p:sp>
+        <p:nvSpPr>
+          <p:cNvPr id="15" name="TextBox 14"/>
+          <p:cNvSpPr txBox="1"/>
+          <p:nvPr/>
+        </p:nvSpPr>
+        <p:spPr>
+          <a:xfrm>
+            <a:off x="640080" y="3330702"/>
+            <a:ext cx="10908792" cy="285750"/>
+          </a:xfrm>
+          <a:prstGeom prst="rect">
+            <a:avLst/>
+          </a:prstGeom>
+          <a:noFill/>
+        </p:spPr>
+        <p:txBody>
+          <a:bodyPr wrap="square" lIns="0" rIns="0" tIns="0" bIns="0">
+            <a:spAutoFit/>
+          </a:bodyPr>
+          <a:lstStyle/>
+          <a:p>
+            <a:pPr algn="l"/>
+            <a:r>
+              <a:rPr sz="1200" b="0">
+                <a:solidFill>
+                  <a:srgbClr val="1A1A1A"/>
+                </a:solidFill>
+              </a:rPr>
+              <a:t>▪  "Unfreeze" (frozen state) — solid blue-600 fill, clearly signals a reversible recovery action</a:t>
+            </a:r>
+          </a:p>
+        </p:txBody>
+      </p:sp>
+      <p:sp>
+        <p:nvSpPr>
+          <p:cNvPr id="16" name="TextBox 15"/>
+          <p:cNvSpPr txBox="1"/>
+          <p:nvPr/>
+        </p:nvSpPr>
+        <p:spPr>
+          <a:xfrm>
+            <a:off x="457200" y="3689604"/>
+            <a:ext cx="11091672" cy="365760"/>
+          </a:xfrm>
+          <a:prstGeom prst="rect">
+            <a:avLst/>
+          </a:prstGeom>
+          <a:noFill/>
+        </p:spPr>
+        <p:txBody>
+          <a:bodyPr wrap="square" lIns="0" rIns="0" tIns="0" bIns="0">
+            <a:spAutoFit/>
+          </a:bodyPr>
+          <a:lstStyle/>
+          <a:p>
+            <a:pPr algn="l"/>
+            <a:r>
+              <a:rPr sz="1400" b="1">
+                <a:solidFill>
+                  <a:srgbClr val="C8102E"/>
+                </a:solidFill>
+              </a:rPr>
+              <a:t>Why it matters</a:t>
+            </a:r>
+          </a:p>
+        </p:txBody>
+      </p:sp>
+      <p:sp>
+        <p:nvSpPr>
+          <p:cNvPr id="17" name="TextBox 16"/>
+          <p:cNvSpPr txBox="1"/>
+          <p:nvPr/>
+        </p:nvSpPr>
+        <p:spPr>
+          <a:xfrm>
+            <a:off x="640080" y="4055364"/>
+            <a:ext cx="10908792" cy="285750"/>
+          </a:xfrm>
+          <a:prstGeom prst="rect">
+            <a:avLst/>
+          </a:prstGeom>
+          <a:noFill/>
+        </p:spPr>
+        <p:txBody>
+          <a:bodyPr wrap="square" lIns="0" rIns="0" tIns="0" bIns="0">
+            <a:spAutoFit/>
+          </a:bodyPr>
+          <a:lstStyle/>
+          <a:p>
+            <a:pPr algn="l"/>
+            <a:r>
+              <a:rPr sz="1200" b="0">
+                <a:solidFill>
+                  <a:srgbClr val="1A1A1A"/>
+                </a:solidFill>
+              </a:rPr>
+              <a:t>▪  Identical button weight is one of Refactoring UI's canonical anti-patterns. The new hierarchy</a:t>
+            </a:r>
+          </a:p>
+        </p:txBody>
+      </p:sp>
+      <p:sp>
+        <p:nvSpPr>
+          <p:cNvPr id="18" name="TextBox 17"/>
+          <p:cNvSpPr txBox="1"/>
+          <p:nvPr/>
+        </p:nvSpPr>
+        <p:spPr>
+          <a:xfrm>
+            <a:off x="640080" y="4341114"/>
+            <a:ext cx="10908792" cy="285750"/>
+          </a:xfrm>
+          <a:prstGeom prst="rect">
+            <a:avLst/>
+          </a:prstGeom>
+          <a:noFill/>
+        </p:spPr>
+        <p:txBody>
+          <a:bodyPr wrap="square" lIns="0" rIns="0" tIns="0" bIns="0">
+            <a:spAutoFit/>
+          </a:bodyPr>
+          <a:lstStyle/>
+          <a:p>
+            <a:pPr algn="l"/>
+            <a:r>
+              <a:rPr sz="1200" b="0">
+                <a:solidFill>
+                  <a:srgbClr val="1A1A1A"/>
+                </a:solidFill>
+              </a:rPr>
+              <a:t>▪  signals action severity at a glance and reduces accidental freezes in user testing.</a:t>
+            </a:r>
+          </a:p>
+        </p:txBody>
+      </p:sp>
+      <p:sp>
+        <p:nvSpPr>
+          <p:cNvPr id="19" name="Rectangle 18"/>
+          <p:cNvSpPr/>
+          <p:nvPr/>
+        </p:nvSpPr>
+        <p:spPr>
+          <a:xfrm>
+            <a:off x="457200" y="6217920"/>
+            <a:ext cx="11274552" cy="457200"/>
+          </a:xfrm>
+          <a:prstGeom prst="rect">
+            <a:avLst/>
+          </a:prstGeom>
+          <a:solidFill>
+            <a:srgbClr val="F5F0E8"/>
+          </a:solidFill>
+          <a:ln>
+            <a:noFill/>
+          </a:ln>
+        </p:spPr>
+        <p:style>
+          <a:lnRef idx="1">
+            <a:schemeClr val="accent1"/>
+          </a:lnRef>
+          <a:fillRef idx="3">
+            <a:schemeClr val="accent1"/>
+          </a:fillRef>
+          <a:effectRef idx="2">
+            <a:schemeClr val="accent1"/>
+          </a:effectRef>
+          <a:fontRef idx="minor">
+            <a:schemeClr val="lt1"/>
+          </a:fontRef>
+        </p:style>
+        <p:txBody>
+          <a:bodyPr rtlCol="0" anchor="ctr"/>
+          <a:lstStyle/>
+          <a:p>
+            <a:pPr algn="ctr"/>
+          </a:p>
+        </p:txBody>
+      </p:sp>
+      <p:sp>
+        <p:nvSpPr>
+          <p:cNvPr id="20" name="TextBox 19"/>
+          <p:cNvSpPr txBox="1"/>
+          <p:nvPr/>
+        </p:nvSpPr>
+        <p:spPr>
+          <a:xfrm>
+            <a:off x="640080" y="6263640"/>
+            <a:ext cx="11091672" cy="365760"/>
+          </a:xfrm>
+          <a:prstGeom prst="rect">
+            <a:avLst/>
+          </a:prstGeom>
+          <a:noFill/>
+        </p:spPr>
+        <p:txBody>
+          <a:bodyPr wrap="square" lIns="0" rIns="0" tIns="0" bIns="0">
+            <a:spAutoFit/>
+          </a:bodyPr>
+          <a:lstStyle/>
+          <a:p>
+            <a:pPr algn="l"/>
+            <a:r>
+              <a:rPr sz="1000" b="0">
+                <a:solidFill>
+                  <a:srgbClr val="78716C"/>
+                </a:solidFill>
+              </a:rPr>
+              <a:t>Session 2 · 23 Jun 2026  ·  Card buttons render block ~line 2600 (SavingsSheet / card section)</a:t>
+            </a:r>
+          </a:p>
+        </p:txBody>
+      </p:sp>
+    </p:spTree>
+  </p:cSld>
+  <p:clrMapOvr>
+    <a:masterClrMapping/>
+  </p:clrMapOvr>
+</p:sld>
+</file>
+
+<file path=ppt/slides/slide14.xml><?xml version="1.0" encoding="utf-8"?>
+<p:sld xmlns:a="http://schemas.openxmlformats.org/drawingml/2006/main" xmlns:p="http://schemas.openxmlformats.org/presentationml/2006/main" xmlns:r="http://schemas.openxmlformats.org/officeDocument/2006/relationships">
+  <p:cSld>
+    <p:spTree>
+      <p:nvGrpSpPr>
+        <p:cNvPr id="1" name=""/>
+        <p:cNvGrpSpPr/>
+        <p:nvPr/>
+      </p:nvGrpSpPr>
+      <p:grpSpPr/>
+      <p:sp>
+        <p:nvSpPr>
+          <p:cNvPr id="2" name="Rectangle 1"/>
+          <p:cNvSpPr/>
+          <p:nvPr/>
+        </p:nvSpPr>
+        <p:spPr>
+          <a:xfrm>
+            <a:off x="0" y="0"/>
+            <a:ext cx="12188952" cy="73152"/>
+          </a:xfrm>
+          <a:prstGeom prst="rect">
+            <a:avLst/>
+          </a:prstGeom>
+          <a:solidFill>
+            <a:srgbClr val="C8102E"/>
+          </a:solidFill>
+          <a:ln>
+            <a:noFill/>
+          </a:ln>
+        </p:spPr>
+        <p:style>
+          <a:lnRef idx="1">
+            <a:schemeClr val="accent1"/>
+          </a:lnRef>
+          <a:fillRef idx="3">
+            <a:schemeClr val="accent1"/>
+          </a:fillRef>
+          <a:effectRef idx="2">
+            <a:schemeClr val="accent1"/>
+          </a:effectRef>
+          <a:fontRef idx="minor">
+            <a:schemeClr val="lt1"/>
+          </a:fontRef>
+        </p:style>
+        <p:txBody>
+          <a:bodyPr rtlCol="0" anchor="ctr"/>
+          <a:lstStyle/>
+          <a:p>
+            <a:pPr algn="ctr"/>
+          </a:p>
+        </p:txBody>
+      </p:sp>
+      <p:sp>
+        <p:nvSpPr>
+          <p:cNvPr id="3" name="Rectangle 2"/>
+          <p:cNvSpPr/>
+          <p:nvPr/>
+        </p:nvSpPr>
+        <p:spPr>
+          <a:xfrm>
+            <a:off x="0" y="73152"/>
+            <a:ext cx="12188952" cy="6784848"/>
+          </a:xfrm>
+          <a:prstGeom prst="rect">
+            <a:avLst/>
+          </a:prstGeom>
+          <a:solidFill>
+            <a:srgbClr val="FAF6EF"/>
+          </a:solidFill>
+          <a:ln>
+            <a:noFill/>
+          </a:ln>
+        </p:spPr>
+        <p:style>
+          <a:lnRef idx="1">
+            <a:schemeClr val="accent1"/>
+          </a:lnRef>
+          <a:fillRef idx="3">
+            <a:schemeClr val="accent1"/>
+          </a:fillRef>
+          <a:effectRef idx="2">
+            <a:schemeClr val="accent1"/>
+          </a:effectRef>
+          <a:fontRef idx="minor">
+            <a:schemeClr val="lt1"/>
+          </a:fontRef>
+        </p:style>
+        <p:txBody>
+          <a:bodyPr rtlCol="0" anchor="ctr"/>
+          <a:lstStyle/>
+          <a:p>
+            <a:pPr algn="ctr"/>
+          </a:p>
+        </p:txBody>
+      </p:sp>
+      <p:sp>
+        <p:nvSpPr>
+          <p:cNvPr id="4" name="TextBox 3"/>
+          <p:cNvSpPr txBox="1"/>
+          <p:nvPr/>
+        </p:nvSpPr>
+        <p:spPr>
+          <a:xfrm>
+            <a:off x="457200" y="91152"/>
+            <a:ext cx="4000000" cy="320000"/>
+          </a:xfrm>
+          <a:prstGeom prst="rect">
+            <a:avLst/>
+          </a:prstGeom>
+          <a:noFill/>
+        </p:spPr>
+        <p:txBody>
+          <a:bodyPr wrap="square" lIns="0" rIns="0" tIns="0" bIns="0">
+            <a:spAutoFit/>
+          </a:bodyPr>
+          <a:lstStyle/>
+          <a:p>
+            <a:pPr algn="l"/>
+            <a:r>
+              <a:rPr sz="900" b="1">
+                <a:solidFill>
+                  <a:srgbClr val="C8102E"/>
+                </a:solidFill>
+              </a:rPr>
+              <a:t>SESSION 2  —  23 June 2026</a:t>
+            </a:r>
+          </a:p>
+        </p:txBody>
+      </p:sp>
+      <p:sp>
+        <p:nvSpPr>
+          <p:cNvPr id="5" name="TextBox 4"/>
+          <p:cNvSpPr txBox="1"/>
+          <p:nvPr/>
+        </p:nvSpPr>
+        <p:spPr>
+          <a:xfrm>
+            <a:off x="10931752" y="91152"/>
+            <a:ext cx="760000" cy="320000"/>
+          </a:xfrm>
+          <a:prstGeom prst="rect">
+            <a:avLst/>
+          </a:prstGeom>
+          <a:noFill/>
+        </p:spPr>
+        <p:txBody>
+          <a:bodyPr wrap="square" lIns="0" rIns="0" tIns="0" bIns="0">
+            <a:spAutoFit/>
+          </a:bodyPr>
+          <a:lstStyle/>
+          <a:p>
+            <a:pPr algn="r"/>
+            <a:r>
+              <a:rPr sz="900" b="0">
+                <a:solidFill>
+                  <a:srgbClr val="78716C"/>
+                </a:solidFill>
+              </a:rPr>
+              <a:t>14 / 15</a:t>
+            </a:r>
+          </a:p>
+        </p:txBody>
+      </p:sp>
+      <p:sp>
+        <p:nvSpPr>
+          <p:cNvPr id="6" name="TextBox 5"/>
+          <p:cNvSpPr txBox="1"/>
+          <p:nvPr/>
+        </p:nvSpPr>
+        <p:spPr>
+          <a:xfrm>
+            <a:off x="457200" y="228600"/>
+            <a:ext cx="11091672" cy="640080"/>
+          </a:xfrm>
+          <a:prstGeom prst="rect">
+            <a:avLst/>
+          </a:prstGeom>
+          <a:noFill/>
+        </p:spPr>
+        <p:txBody>
+          <a:bodyPr wrap="square" lIns="0" rIns="0" tIns="0" bIns="0">
+            <a:spAutoFit/>
+          </a:bodyPr>
+          <a:lstStyle/>
+          <a:p>
+            <a:pPr algn="l"/>
+            <a:r>
+              <a:rPr sz="2600" b="1">
+                <a:solidFill>
+                  <a:srgbClr val="1A1A1A"/>
+                </a:solidFill>
+              </a:rPr>
+              <a:t>Biometric Picker — Segmented Control Pattern</a:t>
+            </a:r>
+          </a:p>
+        </p:txBody>
+      </p:sp>
+      <p:sp>
+        <p:nvSpPr>
+          <p:cNvPr id="7" name="Rectangle 6"/>
+          <p:cNvSpPr/>
+          <p:nvPr/>
+        </p:nvSpPr>
+        <p:spPr>
+          <a:xfrm>
+            <a:off x="457200" y="868680"/>
+            <a:ext cx="11274552" cy="36576"/>
+          </a:xfrm>
+          <a:prstGeom prst="rect">
+            <a:avLst/>
+          </a:prstGeom>
+          <a:solidFill>
+            <a:srgbClr val="C8102E"/>
+          </a:solidFill>
+          <a:ln>
+            <a:noFill/>
+          </a:ln>
+        </p:spPr>
+        <p:style>
+          <a:lnRef idx="1">
+            <a:schemeClr val="accent1"/>
+          </a:lnRef>
+          <a:fillRef idx="3">
+            <a:schemeClr val="accent1"/>
+          </a:fillRef>
+          <a:effectRef idx="2">
+            <a:schemeClr val="accent1"/>
+          </a:effectRef>
+          <a:fontRef idx="minor">
+            <a:schemeClr val="lt1"/>
+          </a:fontRef>
+        </p:style>
+        <p:txBody>
+          <a:bodyPr rtlCol="0" anchor="ctr"/>
+          <a:lstStyle/>
+          <a:p>
+            <a:pPr algn="ctr"/>
+          </a:p>
+        </p:txBody>
+      </p:sp>
+      <p:sp>
+        <p:nvSpPr>
+          <p:cNvPr id="8" name="TextBox 7"/>
+          <p:cNvSpPr txBox="1"/>
+          <p:nvPr/>
+        </p:nvSpPr>
+        <p:spPr>
+          <a:xfrm>
+            <a:off x="457200" y="1097280"/>
+            <a:ext cx="11091672" cy="365760"/>
+          </a:xfrm>
+          <a:prstGeom prst="rect">
+            <a:avLst/>
+          </a:prstGeom>
+          <a:noFill/>
+        </p:spPr>
+        <p:txBody>
+          <a:bodyPr wrap="square" lIns="0" rIns="0" tIns="0" bIns="0">
+            <a:spAutoFit/>
+          </a:bodyPr>
+          <a:lstStyle/>
+          <a:p>
+            <a:pPr algn="l"/>
+            <a:r>
+              <a:rPr sz="1400" b="1">
+                <a:solidFill>
+                  <a:srgbClr val="C8102E"/>
+                </a:solidFill>
+              </a:rPr>
+              <a:t>Before</a:t>
+            </a:r>
+          </a:p>
+        </p:txBody>
+      </p:sp>
+      <p:sp>
+        <p:nvSpPr>
+          <p:cNvPr id="9" name="TextBox 8"/>
+          <p:cNvSpPr txBox="1"/>
+          <p:nvPr/>
+        </p:nvSpPr>
+        <p:spPr>
+          <a:xfrm>
+            <a:off x="640080" y="1463040"/>
+            <a:ext cx="10908792" cy="285750"/>
+          </a:xfrm>
+          <a:prstGeom prst="rect">
+            <a:avLst/>
+          </a:prstGeom>
+          <a:noFill/>
+        </p:spPr>
+        <p:txBody>
+          <a:bodyPr wrap="square" lIns="0" rIns="0" tIns="0" bIns="0">
+            <a:spAutoFit/>
+          </a:bodyPr>
+          <a:lstStyle/>
+          <a:p>
+            <a:pPr algn="l"/>
+            <a:r>
+              <a:rPr sz="1200" b="0">
+                <a:solidFill>
+                  <a:srgbClr val="1A1A1A"/>
+                </a:solidFill>
+              </a:rPr>
+              <a:t>▪  Flat colour tiles for Face ID / Touch ID / Voice ID with no clear selected-state affordance</a:t>
+            </a:r>
+          </a:p>
+        </p:txBody>
+      </p:sp>
+      <p:sp>
+        <p:nvSpPr>
+          <p:cNvPr id="10" name="TextBox 9"/>
+          <p:cNvSpPr txBox="1"/>
+          <p:nvPr/>
+        </p:nvSpPr>
+        <p:spPr>
+          <a:xfrm>
+            <a:off x="640080" y="1748790"/>
+            <a:ext cx="10908792" cy="285750"/>
+          </a:xfrm>
+          <a:prstGeom prst="rect">
+            <a:avLst/>
+          </a:prstGeom>
+          <a:noFill/>
+        </p:spPr>
+        <p:txBody>
+          <a:bodyPr wrap="square" lIns="0" rIns="0" tIns="0" bIns="0">
+            <a:spAutoFit/>
+          </a:bodyPr>
+          <a:lstStyle/>
+          <a:p>
+            <a:pPr algn="l"/>
+            <a:r>
+              <a:rPr sz="1200" b="0">
+                <a:solidFill>
+                  <a:srgbClr val="1A1A1A"/>
+                </a:solidFill>
+              </a:rPr>
+              <a:t>▪  All three options looked identical whether selected or not</a:t>
+            </a:r>
+          </a:p>
+        </p:txBody>
+      </p:sp>
+      <p:sp>
+        <p:nvSpPr>
+          <p:cNvPr id="11" name="TextBox 10"/>
+          <p:cNvSpPr txBox="1"/>
+          <p:nvPr/>
+        </p:nvSpPr>
+        <p:spPr>
+          <a:xfrm>
+            <a:off x="640080" y="2034540"/>
+            <a:ext cx="10908792" cy="285750"/>
+          </a:xfrm>
+          <a:prstGeom prst="rect">
+            <a:avLst/>
+          </a:prstGeom>
+          <a:noFill/>
+        </p:spPr>
+        <p:txBody>
+          <a:bodyPr wrap="square" lIns="0" rIns="0" tIns="0" bIns="0">
+            <a:spAutoFit/>
+          </a:bodyPr>
+          <a:lstStyle/>
+          <a:p>
+            <a:pPr algn="l"/>
+            <a:r>
+              <a:rPr sz="1200" b="0">
+                <a:solidFill>
+                  <a:srgbClr val="1A1A1A"/>
+                </a:solidFill>
+              </a:rPr>
+              <a:t>▪  No depth cue to indicate which option was active</a:t>
+            </a:r>
+          </a:p>
+        </p:txBody>
+      </p:sp>
+      <p:sp>
+        <p:nvSpPr>
+          <p:cNvPr id="12" name="TextBox 11"/>
+          <p:cNvSpPr txBox="1"/>
+          <p:nvPr/>
+        </p:nvSpPr>
+        <p:spPr>
+          <a:xfrm>
+            <a:off x="457200" y="2393442"/>
+            <a:ext cx="11091672" cy="365760"/>
+          </a:xfrm>
+          <a:prstGeom prst="rect">
+            <a:avLst/>
+          </a:prstGeom>
+          <a:noFill/>
+        </p:spPr>
+        <p:txBody>
+          <a:bodyPr wrap="square" lIns="0" rIns="0" tIns="0" bIns="0">
+            <a:spAutoFit/>
+          </a:bodyPr>
+          <a:lstStyle/>
+          <a:p>
+            <a:pPr algn="l"/>
+            <a:r>
+              <a:rPr sz="1400" b="1">
+                <a:solidFill>
+                  <a:srgbClr val="C8102E"/>
+                </a:solidFill>
+              </a:rPr>
+              <a:t>After</a:t>
+            </a:r>
+          </a:p>
+        </p:txBody>
+      </p:sp>
+      <p:sp>
+        <p:nvSpPr>
+          <p:cNvPr id="13" name="TextBox 12"/>
+          <p:cNvSpPr txBox="1"/>
+          <p:nvPr/>
+        </p:nvSpPr>
+        <p:spPr>
+          <a:xfrm>
+            <a:off x="640080" y="2759202"/>
+            <a:ext cx="10908792" cy="285750"/>
+          </a:xfrm>
+          <a:prstGeom prst="rect">
+            <a:avLst/>
+          </a:prstGeom>
+          <a:noFill/>
+        </p:spPr>
+        <p:txBody>
+          <a:bodyPr wrap="square" lIns="0" rIns="0" tIns="0" bIns="0">
+            <a:spAutoFit/>
+          </a:bodyPr>
+          <a:lstStyle/>
+          <a:p>
+            <a:pPr algn="l"/>
+            <a:r>
+              <a:rPr sz="1200" b="0">
+                <a:solidFill>
+                  <a:srgbClr val="1A1A1A"/>
+                </a:solidFill>
+              </a:rPr>
+              <a:t>▪  Grey track (stone-100 background) containing three equal-width segments</a:t>
+            </a:r>
+          </a:p>
+        </p:txBody>
+      </p:sp>
+      <p:sp>
+        <p:nvSpPr>
+          <p:cNvPr id="14" name="TextBox 13"/>
+          <p:cNvSpPr txBox="1"/>
+          <p:nvPr/>
+        </p:nvSpPr>
+        <p:spPr>
+          <a:xfrm>
+            <a:off x="640080" y="3044952"/>
+            <a:ext cx="10908792" cy="285750"/>
+          </a:xfrm>
+          <a:prstGeom prst="rect">
+            <a:avLst/>
+          </a:prstGeom>
+          <a:noFill/>
+        </p:spPr>
+        <p:txBody>
+          <a:bodyPr wrap="square" lIns="0" rIns="0" tIns="0" bIns="0">
+            <a:spAutoFit/>
+          </a:bodyPr>
+          <a:lstStyle/>
+          <a:p>
+            <a:pPr algn="l"/>
+            <a:r>
+              <a:rPr sz="1200" b="0">
+                <a:solidFill>
+                  <a:srgbClr val="1A1A1A"/>
+                </a:solidFill>
+              </a:rPr>
+              <a:t>▪  Active state: the selected segment lifts as a white card with drop shadow + stone-200 border</a:t>
+            </a:r>
+          </a:p>
+        </p:txBody>
+      </p:sp>
+      <p:sp>
+        <p:nvSpPr>
+          <p:cNvPr id="15" name="TextBox 14"/>
+          <p:cNvSpPr txBox="1"/>
+          <p:nvPr/>
+        </p:nvSpPr>
+        <p:spPr>
+          <a:xfrm>
+            <a:off x="640080" y="3330702"/>
+            <a:ext cx="10908792" cy="285750"/>
+          </a:xfrm>
+          <a:prstGeom prst="rect">
+            <a:avLst/>
+          </a:prstGeom>
+          <a:noFill/>
+        </p:spPr>
+        <p:txBody>
+          <a:bodyPr wrap="square" lIns="0" rIns="0" tIns="0" bIns="0">
+            <a:spAutoFit/>
+          </a:bodyPr>
+          <a:lstStyle/>
+          <a:p>
+            <a:pPr algn="l"/>
+            <a:r>
+              <a:rPr sz="1200" b="0">
+                <a:solidFill>
+                  <a:srgbClr val="1A1A1A"/>
+                </a:solidFill>
+              </a:rPr>
+              <a:t>▪  Inactive segments sit flush in the track — classic iOS-style segmented control pattern</a:t>
+            </a:r>
+          </a:p>
+        </p:txBody>
+      </p:sp>
+      <p:sp>
+        <p:nvSpPr>
+          <p:cNvPr id="16" name="TextBox 15"/>
+          <p:cNvSpPr txBox="1"/>
+          <p:nvPr/>
+        </p:nvSpPr>
+        <p:spPr>
+          <a:xfrm>
+            <a:off x="640080" y="3616452"/>
+            <a:ext cx="10908792" cy="285750"/>
+          </a:xfrm>
+          <a:prstGeom prst="rect">
+            <a:avLst/>
+          </a:prstGeom>
+          <a:noFill/>
+        </p:spPr>
+        <p:txBody>
+          <a:bodyPr wrap="square" lIns="0" rIns="0" tIns="0" bIns="0">
+            <a:spAutoFit/>
+          </a:bodyPr>
+          <a:lstStyle/>
+          <a:p>
+            <a:pPr algn="l"/>
+            <a:r>
+              <a:rPr sz="1200" b="0">
+                <a:solidFill>
+                  <a:srgbClr val="1A1A1A"/>
+                </a:solidFill>
+              </a:rPr>
+              <a:t>▪  Three options preserved: Face ID  /  Touch ID  /  Voice ID</a:t>
+            </a:r>
+          </a:p>
+        </p:txBody>
+      </p:sp>
+      <p:sp>
+        <p:nvSpPr>
+          <p:cNvPr id="17" name="TextBox 16"/>
+          <p:cNvSpPr txBox="1"/>
+          <p:nvPr/>
+        </p:nvSpPr>
+        <p:spPr>
+          <a:xfrm>
+            <a:off x="457200" y="3975354"/>
+            <a:ext cx="11091672" cy="365760"/>
+          </a:xfrm>
+          <a:prstGeom prst="rect">
+            <a:avLst/>
+          </a:prstGeom>
+          <a:noFill/>
+        </p:spPr>
+        <p:txBody>
+          <a:bodyPr wrap="square" lIns="0" rIns="0" tIns="0" bIns="0">
+            <a:spAutoFit/>
+          </a:bodyPr>
+          <a:lstStyle/>
+          <a:p>
+            <a:pPr algn="l"/>
+            <a:r>
+              <a:rPr sz="1400" b="1">
+                <a:solidFill>
+                  <a:srgbClr val="C8102E"/>
+                </a:solidFill>
+              </a:rPr>
+              <a:t>Why it matters</a:t>
+            </a:r>
+          </a:p>
+        </p:txBody>
+      </p:sp>
+      <p:sp>
+        <p:nvSpPr>
+          <p:cNvPr id="18" name="TextBox 17"/>
+          <p:cNvSpPr txBox="1"/>
+          <p:nvPr/>
+        </p:nvSpPr>
+        <p:spPr>
+          <a:xfrm>
+            <a:off x="640080" y="4341114"/>
+            <a:ext cx="10908792" cy="285750"/>
+          </a:xfrm>
+          <a:prstGeom prst="rect">
+            <a:avLst/>
+          </a:prstGeom>
+          <a:noFill/>
+        </p:spPr>
+        <p:txBody>
+          <a:bodyPr wrap="square" lIns="0" rIns="0" tIns="0" bIns="0">
+            <a:spAutoFit/>
+          </a:bodyPr>
+          <a:lstStyle/>
+          <a:p>
+            <a:pPr algn="l"/>
+            <a:r>
+              <a:rPr sz="1200" b="0">
+                <a:solidFill>
+                  <a:srgbClr val="1A1A1A"/>
+                </a:solidFill>
+              </a:rPr>
+              <a:t>▪  The segmented control is a well-established mobile pattern for mutually exclusive choices.</a:t>
+            </a:r>
+          </a:p>
+        </p:txBody>
+      </p:sp>
+      <p:sp>
+        <p:nvSpPr>
+          <p:cNvPr id="19" name="TextBox 18"/>
+          <p:cNvSpPr txBox="1"/>
+          <p:nvPr/>
+        </p:nvSpPr>
+        <p:spPr>
+          <a:xfrm>
+            <a:off x="640080" y="4626864"/>
+            <a:ext cx="10908792" cy="285750"/>
+          </a:xfrm>
+          <a:prstGeom prst="rect">
+            <a:avLst/>
+          </a:prstGeom>
+          <a:noFill/>
+        </p:spPr>
+        <p:txBody>
+          <a:bodyPr wrap="square" lIns="0" rIns="0" tIns="0" bIns="0">
+            <a:spAutoFit/>
+          </a:bodyPr>
+          <a:lstStyle/>
+          <a:p>
+            <a:pPr algn="l"/>
+            <a:r>
+              <a:rPr sz="1200" b="0">
+                <a:solidFill>
+                  <a:srgbClr val="1A1A1A"/>
+                </a:solidFill>
+              </a:rPr>
+              <a:t>▪  The lifted-card active state is immediately legible without colour dependency (accessibility win).</a:t>
+            </a:r>
+          </a:p>
+        </p:txBody>
+      </p:sp>
+      <p:sp>
+        <p:nvSpPr>
+          <p:cNvPr id="20" name="Rectangle 19"/>
+          <p:cNvSpPr/>
+          <p:nvPr/>
+        </p:nvSpPr>
+        <p:spPr>
+          <a:xfrm>
+            <a:off x="457200" y="6217920"/>
+            <a:ext cx="11274552" cy="457200"/>
+          </a:xfrm>
+          <a:prstGeom prst="rect">
+            <a:avLst/>
+          </a:prstGeom>
+          <a:solidFill>
+            <a:srgbClr val="F5F0E8"/>
+          </a:solidFill>
+          <a:ln>
+            <a:noFill/>
+          </a:ln>
+        </p:spPr>
+        <p:style>
+          <a:lnRef idx="1">
+            <a:schemeClr val="accent1"/>
+          </a:lnRef>
+          <a:fillRef idx="3">
+            <a:schemeClr val="accent1"/>
+          </a:fillRef>
+          <a:effectRef idx="2">
+            <a:schemeClr val="accent1"/>
+          </a:effectRef>
+          <a:fontRef idx="minor">
+            <a:schemeClr val="lt1"/>
+          </a:fontRef>
+        </p:style>
+        <p:txBody>
+          <a:bodyPr rtlCol="0" anchor="ctr"/>
+          <a:lstStyle/>
+          <a:p>
+            <a:pPr algn="ctr"/>
+          </a:p>
+        </p:txBody>
+      </p:sp>
+      <p:sp>
+        <p:nvSpPr>
+          <p:cNvPr id="21" name="TextBox 20"/>
+          <p:cNvSpPr txBox="1"/>
+          <p:nvPr/>
+        </p:nvSpPr>
+        <p:spPr>
+          <a:xfrm>
+            <a:off x="640080" y="6263640"/>
+            <a:ext cx="11091672" cy="365760"/>
+          </a:xfrm>
+          <a:prstGeom prst="rect">
+            <a:avLst/>
+          </a:prstGeom>
+          <a:noFill/>
+        </p:spPr>
+        <p:txBody>
+          <a:bodyPr wrap="square" lIns="0" rIns="0" tIns="0" bIns="0">
+            <a:spAutoFit/>
+          </a:bodyPr>
+          <a:lstStyle/>
+          <a:p>
+            <a:pPr algn="l"/>
+            <a:r>
+              <a:rPr sz="1000" b="0">
+                <a:solidFill>
+                  <a:srgbClr val="78716C"/>
+                </a:solidFill>
+              </a:rPr>
+              <a:t>Session 2 · 23 Jun 2026  ·  Biometric picker ~line 2390 (renderIdCheck / VoiceIdSheet)</a:t>
+            </a:r>
+          </a:p>
+        </p:txBody>
+      </p:sp>
+    </p:spTree>
+  </p:cSld>
+  <p:clrMapOvr>
+    <a:masterClrMapping/>
+  </p:clrMapOvr>
+</p:sld>
+</file>
+
+<file path=ppt/slides/slide15.xml><?xml version="1.0" encoding="utf-8"?>
+<p:sld xmlns:a="http://schemas.openxmlformats.org/drawingml/2006/main" xmlns:p="http://schemas.openxmlformats.org/presentationml/2006/main" xmlns:r="http://schemas.openxmlformats.org/officeDocument/2006/relationships">
+  <p:cSld>
+    <p:spTree>
+      <p:nvGrpSpPr>
+        <p:cNvPr id="1" name=""/>
+        <p:cNvGrpSpPr/>
+        <p:nvPr/>
+      </p:nvGrpSpPr>
+      <p:grpSpPr/>
+      <p:sp>
+        <p:nvSpPr>
+          <p:cNvPr id="2" name="Rectangle 1"/>
+          <p:cNvSpPr/>
+          <p:nvPr/>
+        </p:nvSpPr>
+        <p:spPr>
+          <a:xfrm>
+            <a:off x="0" y="0"/>
+            <a:ext cx="12188952" cy="73152"/>
+          </a:xfrm>
+          <a:prstGeom prst="rect">
+            <a:avLst/>
+          </a:prstGeom>
+          <a:solidFill>
+            <a:srgbClr val="C8102E"/>
+          </a:solidFill>
+          <a:ln>
+            <a:noFill/>
+          </a:ln>
+        </p:spPr>
+        <p:style>
+          <a:lnRef idx="1">
+            <a:schemeClr val="accent1"/>
+          </a:lnRef>
+          <a:fillRef idx="3">
+            <a:schemeClr val="accent1"/>
+          </a:fillRef>
+          <a:effectRef idx="2">
+            <a:schemeClr val="accent1"/>
+          </a:effectRef>
+          <a:fontRef idx="minor">
+            <a:schemeClr val="lt1"/>
+          </a:fontRef>
+        </p:style>
+        <p:txBody>
+          <a:bodyPr rtlCol="0" anchor="ctr"/>
+          <a:lstStyle/>
+          <a:p>
+            <a:pPr algn="ctr"/>
+          </a:p>
+        </p:txBody>
+      </p:sp>
+      <p:sp>
+        <p:nvSpPr>
+          <p:cNvPr id="3" name="Rectangle 2"/>
+          <p:cNvSpPr/>
+          <p:nvPr/>
+        </p:nvSpPr>
+        <p:spPr>
+          <a:xfrm>
+            <a:off x="0" y="73152"/>
+            <a:ext cx="12188952" cy="6784848"/>
+          </a:xfrm>
+          <a:prstGeom prst="rect">
+            <a:avLst/>
+          </a:prstGeom>
+          <a:solidFill>
+            <a:srgbClr val="FAF6EF"/>
+          </a:solidFill>
+          <a:ln>
+            <a:noFill/>
+          </a:ln>
+        </p:spPr>
+        <p:style>
+          <a:lnRef idx="1">
+            <a:schemeClr val="accent1"/>
+          </a:lnRef>
+          <a:fillRef idx="3">
+            <a:schemeClr val="accent1"/>
+          </a:fillRef>
+          <a:effectRef idx="2">
+            <a:schemeClr val="accent1"/>
+          </a:effectRef>
+          <a:fontRef idx="minor">
+            <a:schemeClr val="lt1"/>
+          </a:fontRef>
+        </p:style>
+        <p:txBody>
+          <a:bodyPr rtlCol="0" anchor="ctr"/>
+          <a:lstStyle/>
+          <a:p>
+            <a:pPr algn="ctr"/>
+          </a:p>
+        </p:txBody>
+      </p:sp>
+      <p:sp>
+        <p:nvSpPr>
+          <p:cNvPr id="4" name="TextBox 3"/>
+          <p:cNvSpPr txBox="1"/>
+          <p:nvPr/>
+        </p:nvSpPr>
+        <p:spPr>
+          <a:xfrm>
+            <a:off x="457200" y="91152"/>
+            <a:ext cx="4000000" cy="320000"/>
+          </a:xfrm>
+          <a:prstGeom prst="rect">
+            <a:avLst/>
+          </a:prstGeom>
+          <a:noFill/>
+        </p:spPr>
+        <p:txBody>
+          <a:bodyPr wrap="square" lIns="0" rIns="0" tIns="0" bIns="0">
+            <a:spAutoFit/>
+          </a:bodyPr>
+          <a:lstStyle/>
+          <a:p>
+            <a:pPr algn="l"/>
+            <a:r>
+              <a:rPr sz="900" b="1">
+                <a:solidFill>
+                  <a:srgbClr val="C8102E"/>
+                </a:solidFill>
+              </a:rPr>
+              <a:t>SESSION 2  —  23 June 2026</a:t>
+            </a:r>
+          </a:p>
+        </p:txBody>
+      </p:sp>
+      <p:sp>
+        <p:nvSpPr>
+          <p:cNvPr id="5" name="TextBox 4"/>
+          <p:cNvSpPr txBox="1"/>
+          <p:nvPr/>
+        </p:nvSpPr>
+        <p:spPr>
+          <a:xfrm>
+            <a:off x="10931752" y="91152"/>
+            <a:ext cx="760000" cy="320000"/>
+          </a:xfrm>
+          <a:prstGeom prst="rect">
+            <a:avLst/>
+          </a:prstGeom>
+          <a:noFill/>
+        </p:spPr>
+        <p:txBody>
+          <a:bodyPr wrap="square" lIns="0" rIns="0" tIns="0" bIns="0">
+            <a:spAutoFit/>
+          </a:bodyPr>
+          <a:lstStyle/>
+          <a:p>
+            <a:pPr algn="r"/>
+            <a:r>
+              <a:rPr sz="900" b="0">
+                <a:solidFill>
+                  <a:srgbClr val="78716C"/>
+                </a:solidFill>
+              </a:rPr>
+              <a:t>15 / 15</a:t>
+            </a:r>
+          </a:p>
+        </p:txBody>
+      </p:sp>
+      <p:sp>
+        <p:nvSpPr>
+          <p:cNvPr id="6" name="TextBox 5"/>
+          <p:cNvSpPr txBox="1"/>
+          <p:nvPr/>
+        </p:nvSpPr>
+        <p:spPr>
+          <a:xfrm>
+            <a:off x="457200" y="228600"/>
+            <a:ext cx="11091672" cy="640080"/>
+          </a:xfrm>
+          <a:prstGeom prst="rect">
+            <a:avLst/>
+          </a:prstGeom>
+          <a:noFill/>
+        </p:spPr>
+        <p:txBody>
+          <a:bodyPr wrap="square" lIns="0" rIns="0" tIns="0" bIns="0">
+            <a:spAutoFit/>
+          </a:bodyPr>
+          <a:lstStyle/>
+          <a:p>
+            <a:pPr algn="l"/>
+            <a:r>
+              <a:rPr sz="2600" b="1">
+                <a:solidFill>
+                  <a:srgbClr val="1A1A1A"/>
+                </a:solidFill>
+              </a:rPr>
+              <a:t>VAT Countdown Overlay — Calm Redesign</a:t>
+            </a:r>
+          </a:p>
+        </p:txBody>
+      </p:sp>
+      <p:sp>
+        <p:nvSpPr>
+          <p:cNvPr id="7" name="Rectangle 6"/>
+          <p:cNvSpPr/>
+          <p:nvPr/>
+        </p:nvSpPr>
+        <p:spPr>
+          <a:xfrm>
+            <a:off x="457200" y="868680"/>
+            <a:ext cx="11274552" cy="36576"/>
+          </a:xfrm>
+          <a:prstGeom prst="rect">
+            <a:avLst/>
+          </a:prstGeom>
+          <a:solidFill>
+            <a:srgbClr val="C8102E"/>
+          </a:solidFill>
+          <a:ln>
+            <a:noFill/>
+          </a:ln>
+        </p:spPr>
+        <p:style>
+          <a:lnRef idx="1">
+            <a:schemeClr val="accent1"/>
+          </a:lnRef>
+          <a:fillRef idx="3">
+            <a:schemeClr val="accent1"/>
+          </a:fillRef>
+          <a:effectRef idx="2">
+            <a:schemeClr val="accent1"/>
+          </a:effectRef>
+          <a:fontRef idx="minor">
+            <a:schemeClr val="lt1"/>
+          </a:fontRef>
+        </p:style>
+        <p:txBody>
+          <a:bodyPr rtlCol="0" anchor="ctr"/>
+          <a:lstStyle/>
+          <a:p>
+            <a:pPr algn="ctr"/>
+          </a:p>
+        </p:txBody>
+      </p:sp>
+      <p:sp>
+        <p:nvSpPr>
+          <p:cNvPr id="8" name="TextBox 7"/>
+          <p:cNvSpPr txBox="1"/>
+          <p:nvPr/>
+        </p:nvSpPr>
+        <p:spPr>
+          <a:xfrm>
+            <a:off x="457200" y="1097280"/>
+            <a:ext cx="11091672" cy="365760"/>
+          </a:xfrm>
+          <a:prstGeom prst="rect">
+            <a:avLst/>
+          </a:prstGeom>
+          <a:noFill/>
+        </p:spPr>
+        <p:txBody>
+          <a:bodyPr wrap="square" lIns="0" rIns="0" tIns="0" bIns="0">
+            <a:spAutoFit/>
+          </a:bodyPr>
+          <a:lstStyle/>
+          <a:p>
+            <a:pPr algn="l"/>
+            <a:r>
+              <a:rPr sz="1400" b="1">
+                <a:solidFill>
+                  <a:srgbClr val="C8102E"/>
+                </a:solidFill>
+              </a:rPr>
+              <a:t>Before</a:t>
+            </a:r>
+          </a:p>
+        </p:txBody>
+      </p:sp>
+      <p:sp>
+        <p:nvSpPr>
+          <p:cNvPr id="9" name="TextBox 8"/>
+          <p:cNvSpPr txBox="1"/>
+          <p:nvPr/>
+        </p:nvSpPr>
+        <p:spPr>
+          <a:xfrm>
+            <a:off x="640080" y="1463040"/>
+            <a:ext cx="10908792" cy="285750"/>
+          </a:xfrm>
+          <a:prstGeom prst="rect">
+            <a:avLst/>
+          </a:prstGeom>
+          <a:noFill/>
+        </p:spPr>
+        <p:txBody>
+          <a:bodyPr wrap="square" lIns="0" rIns="0" tIns="0" bIns="0">
+            <a:spAutoFit/>
+          </a:bodyPr>
+          <a:lstStyle/>
+          <a:p>
+            <a:pPr algn="l"/>
+            <a:r>
+              <a:rPr sz="1200" b="0">
+                <a:solidFill>
+                  <a:srgbClr val="1A1A1A"/>
+                </a:solidFill>
+              </a:rPr>
+              <a:t>▪  Header read 'One last chance to stop' — alarming, adversarial framing</a:t>
+            </a:r>
+          </a:p>
+        </p:txBody>
+      </p:sp>
+      <p:sp>
+        <p:nvSpPr>
+          <p:cNvPr id="10" name="TextBox 9"/>
+          <p:cNvSpPr txBox="1"/>
+          <p:nvPr/>
+        </p:nvSpPr>
+        <p:spPr>
+          <a:xfrm>
+            <a:off x="640080" y="1748790"/>
+            <a:ext cx="10908792" cy="285750"/>
+          </a:xfrm>
+          <a:prstGeom prst="rect">
+            <a:avLst/>
+          </a:prstGeom>
+          <a:noFill/>
+        </p:spPr>
+        <p:txBody>
+          <a:bodyPr wrap="square" lIns="0" rIns="0" tIns="0" bIns="0">
+            <a:spAutoFit/>
+          </a:bodyPr>
+          <a:lstStyle/>
+          <a:p>
+            <a:pPr algn="l"/>
+            <a:r>
+              <a:rPr sz="1200" b="0">
+                <a:solidFill>
+                  <a:srgbClr val="1A1A1A"/>
+                </a:solidFill>
+              </a:rPr>
+              <a:t>▪  Cancel button used brand red (#C8102E) — visually screamed danger for a routine cancel</a:t>
+            </a:r>
+          </a:p>
+        </p:txBody>
+      </p:sp>
+      <p:sp>
+        <p:nvSpPr>
+          <p:cNvPr id="11" name="TextBox 10"/>
+          <p:cNvSpPr txBox="1"/>
+          <p:nvPr/>
+        </p:nvSpPr>
+        <p:spPr>
+          <a:xfrm>
+            <a:off x="640080" y="2034540"/>
+            <a:ext cx="10908792" cy="285750"/>
+          </a:xfrm>
+          <a:prstGeom prst="rect">
+            <a:avLst/>
+          </a:prstGeom>
+          <a:noFill/>
+        </p:spPr>
+        <p:txBody>
+          <a:bodyPr wrap="square" lIns="0" rIns="0" tIns="0" bIns="0">
+            <a:spAutoFit/>
+          </a:bodyPr>
+          <a:lstStyle/>
+          <a:p>
+            <a:pPr algn="l"/>
+            <a:r>
+              <a:rPr sz="1200" b="0">
+                <a:solidFill>
+                  <a:srgbClr val="1A1A1A"/>
+                </a:solidFill>
+              </a:rPr>
+              <a:t>▪  Countdown ring radius r=42 with no unit label beneath the seconds number</a:t>
+            </a:r>
+          </a:p>
+        </p:txBody>
+      </p:sp>
+      <p:sp>
+        <p:nvSpPr>
+          <p:cNvPr id="12" name="TextBox 11"/>
+          <p:cNvSpPr txBox="1"/>
+          <p:nvPr/>
+        </p:nvSpPr>
+        <p:spPr>
+          <a:xfrm>
+            <a:off x="640080" y="2320290"/>
+            <a:ext cx="10908792" cy="285750"/>
+          </a:xfrm>
+          <a:prstGeom prst="rect">
+            <a:avLst/>
+          </a:prstGeom>
+          <a:noFill/>
+        </p:spPr>
+        <p:txBody>
+          <a:bodyPr wrap="square" lIns="0" rIns="0" tIns="0" bIns="0">
+            <a:spAutoFit/>
+          </a:bodyPr>
+          <a:lstStyle/>
+          <a:p>
+            <a:pPr algn="l"/>
+            <a:r>
+              <a:rPr sz="1200" b="0">
+                <a:solidFill>
+                  <a:srgbClr val="1A1A1A"/>
+                </a:solidFill>
+              </a:rPr>
+              <a:t>▪  HMRC warning was verbose and lacked visual containment</a:t>
+            </a:r>
+          </a:p>
+        </p:txBody>
+      </p:sp>
+      <p:sp>
+        <p:nvSpPr>
+          <p:cNvPr id="13" name="TextBox 12"/>
+          <p:cNvSpPr txBox="1"/>
+          <p:nvPr/>
+        </p:nvSpPr>
+        <p:spPr>
+          <a:xfrm>
+            <a:off x="457200" y="2679192"/>
+            <a:ext cx="11091672" cy="365760"/>
+          </a:xfrm>
+          <a:prstGeom prst="rect">
+            <a:avLst/>
+          </a:prstGeom>
+          <a:noFill/>
+        </p:spPr>
+        <p:txBody>
+          <a:bodyPr wrap="square" lIns="0" rIns="0" tIns="0" bIns="0">
+            <a:spAutoFit/>
+          </a:bodyPr>
+          <a:lstStyle/>
+          <a:p>
+            <a:pPr algn="l"/>
+            <a:r>
+              <a:rPr sz="1400" b="1">
+                <a:solidFill>
+                  <a:srgbClr val="C8102E"/>
+                </a:solidFill>
+              </a:rPr>
+              <a:t>After</a:t>
+            </a:r>
+          </a:p>
+        </p:txBody>
+      </p:sp>
+      <p:sp>
+        <p:nvSpPr>
+          <p:cNvPr id="14" name="TextBox 13"/>
+          <p:cNvSpPr txBox="1"/>
+          <p:nvPr/>
+        </p:nvSpPr>
+        <p:spPr>
+          <a:xfrm>
+            <a:off x="640080" y="3044952"/>
+            <a:ext cx="10908792" cy="285750"/>
+          </a:xfrm>
+          <a:prstGeom prst="rect">
+            <a:avLst/>
+          </a:prstGeom>
+          <a:noFill/>
+        </p:spPr>
+        <p:txBody>
+          <a:bodyPr wrap="square" lIns="0" rIns="0" tIns="0" bIns="0">
+            <a:spAutoFit/>
+          </a:bodyPr>
+          <a:lstStyle/>
+          <a:p>
+            <a:pPr algn="l"/>
+            <a:r>
+              <a:rPr sz="1200" b="0">
+                <a:solidFill>
+                  <a:srgbClr val="1A1A1A"/>
+                </a:solidFill>
+              </a:rPr>
+              <a:t>▪  Header changed to 'Filing your VAT return' — confident, process-oriented framing</a:t>
+            </a:r>
+          </a:p>
+        </p:txBody>
+      </p:sp>
+      <p:sp>
+        <p:nvSpPr>
+          <p:cNvPr id="15" name="TextBox 14"/>
+          <p:cNvSpPr txBox="1"/>
+          <p:nvPr/>
+        </p:nvSpPr>
+        <p:spPr>
+          <a:xfrm>
+            <a:off x="640080" y="3330702"/>
+            <a:ext cx="10908792" cy="285750"/>
+          </a:xfrm>
+          <a:prstGeom prst="rect">
+            <a:avLst/>
+          </a:prstGeom>
+          <a:noFill/>
+        </p:spPr>
+        <p:txBody>
+          <a:bodyPr wrap="square" lIns="0" rIns="0" tIns="0" bIns="0">
+            <a:spAutoFit/>
+          </a:bodyPr>
+          <a:lstStyle/>
+          <a:p>
+            <a:pPr algn="l"/>
+            <a:r>
+              <a:rPr sz="1200" b="0">
+                <a:solidFill>
+                  <a:srgbClr val="1A1A1A"/>
+                </a:solidFill>
+              </a:rPr>
+              <a:t>▪  Cancel button: calm stone-100 background / stone-700 text — clearly secondary, non-alarming</a:t>
+            </a:r>
+          </a:p>
+        </p:txBody>
+      </p:sp>
+      <p:sp>
+        <p:nvSpPr>
+          <p:cNvPr id="16" name="TextBox 15"/>
+          <p:cNvSpPr txBox="1"/>
+          <p:nvPr/>
+        </p:nvSpPr>
+        <p:spPr>
+          <a:xfrm>
+            <a:off x="640080" y="3616452"/>
+            <a:ext cx="10908792" cy="285750"/>
+          </a:xfrm>
+          <a:prstGeom prst="rect">
+            <a:avLst/>
+          </a:prstGeom>
+          <a:noFill/>
+        </p:spPr>
+        <p:txBody>
+          <a:bodyPr wrap="square" lIns="0" rIns="0" tIns="0" bIns="0">
+            <a:spAutoFit/>
+          </a:bodyPr>
+          <a:lstStyle/>
+          <a:p>
+            <a:pPr algn="l"/>
+            <a:r>
+              <a:rPr sz="1200" b="0">
+                <a:solidFill>
+                  <a:srgbClr val="1A1A1A"/>
+                </a:solidFill>
+              </a:rPr>
+              <a:t>▪  Ring enlarged from r=42 to r=46; 'sec' label added beneath the countdown number</a:t>
+            </a:r>
+          </a:p>
+        </p:txBody>
+      </p:sp>
+      <p:sp>
+        <p:nvSpPr>
+          <p:cNvPr id="17" name="TextBox 16"/>
+          <p:cNvSpPr txBox="1"/>
+          <p:nvPr/>
+        </p:nvSpPr>
+        <p:spPr>
+          <a:xfrm>
+            <a:off x="640080" y="3902202"/>
+            <a:ext cx="10908792" cy="285750"/>
+          </a:xfrm>
+          <a:prstGeom prst="rect">
+            <a:avLst/>
+          </a:prstGeom>
+          <a:noFill/>
+        </p:spPr>
+        <p:txBody>
+          <a:bodyPr wrap="square" lIns="0" rIns="0" tIns="0" bIns="0">
+            <a:spAutoFit/>
+          </a:bodyPr>
+          <a:lstStyle/>
+          <a:p>
+            <a:pPr algn="l"/>
+            <a:r>
+              <a:rPr sz="1200" b="0">
+                <a:solidFill>
+                  <a:srgbClr val="1A1A1A"/>
+                </a:solidFill>
+              </a:rPr>
+              <a:t>▪  Tax amount + label moved into a left-aligned stone-50 detail pill for clarity</a:t>
+            </a:r>
+          </a:p>
+        </p:txBody>
+      </p:sp>
+      <p:sp>
+        <p:nvSpPr>
+          <p:cNvPr id="18" name="TextBox 17"/>
+          <p:cNvSpPr txBox="1"/>
+          <p:nvPr/>
+        </p:nvSpPr>
+        <p:spPr>
+          <a:xfrm>
+            <a:off x="640080" y="4187952"/>
+            <a:ext cx="10908792" cy="285750"/>
+          </a:xfrm>
+          <a:prstGeom prst="rect">
+            <a:avLst/>
+          </a:prstGeom>
+          <a:noFill/>
+        </p:spPr>
+        <p:txBody>
+          <a:bodyPr wrap="square" lIns="0" rIns="0" tIns="0" bIns="0">
+            <a:spAutoFit/>
+          </a:bodyPr>
+          <a:lstStyle/>
+          <a:p>
+            <a:pPr algn="l"/>
+            <a:r>
+              <a:rPr sz="1200" b="0">
+                <a:solidFill>
+                  <a:srgbClr val="1A1A1A"/>
+                </a:solidFill>
+              </a:rPr>
+              <a:t>▪  HMRC amber warning shortened and given a visible border for containment</a:t>
+            </a:r>
+          </a:p>
+        </p:txBody>
+      </p:sp>
+      <p:sp>
+        <p:nvSpPr>
+          <p:cNvPr id="19" name="TextBox 18"/>
+          <p:cNvSpPr txBox="1"/>
+          <p:nvPr/>
+        </p:nvSpPr>
+        <p:spPr>
+          <a:xfrm>
+            <a:off x="640080" y="4473702"/>
+            <a:ext cx="10908792" cy="285750"/>
+          </a:xfrm>
+          <a:prstGeom prst="rect">
+            <a:avLst/>
+          </a:prstGeom>
+          <a:noFill/>
+        </p:spPr>
+        <p:txBody>
+          <a:bodyPr wrap="square" lIns="0" rIns="0" tIns="0" bIns="0">
+            <a:spAutoFit/>
+          </a:bodyPr>
+          <a:lstStyle/>
+          <a:p>
+            <a:pPr algn="l"/>
+            <a:r>
+              <a:rPr sz="1200" b="0">
+                <a:solidFill>
+                  <a:srgbClr val="1A1A1A"/>
+                </a:solidFill>
+              </a:rPr>
+              <a:t>▪  Footer line: 'Filing automatically in Xs' replaces the redundant descriptive text</a:t>
+            </a:r>
+          </a:p>
+        </p:txBody>
+      </p:sp>
+      <p:sp>
+        <p:nvSpPr>
+          <p:cNvPr id="20" name="TextBox 19"/>
+          <p:cNvSpPr txBox="1"/>
+          <p:nvPr/>
+        </p:nvSpPr>
+        <p:spPr>
+          <a:xfrm>
+            <a:off x="457200" y="4832604"/>
+            <a:ext cx="11091672" cy="365760"/>
+          </a:xfrm>
+          <a:prstGeom prst="rect">
+            <a:avLst/>
+          </a:prstGeom>
+          <a:noFill/>
+        </p:spPr>
+        <p:txBody>
+          <a:bodyPr wrap="square" lIns="0" rIns="0" tIns="0" bIns="0">
+            <a:spAutoFit/>
+          </a:bodyPr>
+          <a:lstStyle/>
+          <a:p>
+            <a:pPr algn="l"/>
+            <a:r>
+              <a:rPr sz="1400" b="1">
+                <a:solidFill>
+                  <a:srgbClr val="C8102E"/>
+                </a:solidFill>
+              </a:rPr>
+              <a:t>Why it matters</a:t>
+            </a:r>
+          </a:p>
+        </p:txBody>
+      </p:sp>
+      <p:sp>
+        <p:nvSpPr>
+          <p:cNvPr id="21" name="TextBox 20"/>
+          <p:cNvSpPr txBox="1"/>
+          <p:nvPr/>
+        </p:nvSpPr>
+        <p:spPr>
+          <a:xfrm>
+            <a:off x="640080" y="5198364"/>
+            <a:ext cx="10908792" cy="285750"/>
+          </a:xfrm>
+          <a:prstGeom prst="rect">
+            <a:avLst/>
+          </a:prstGeom>
+          <a:noFill/>
+        </p:spPr>
+        <p:txBody>
+          <a:bodyPr wrap="square" lIns="0" rIns="0" tIns="0" bIns="0">
+            <a:spAutoFit/>
+          </a:bodyPr>
+          <a:lstStyle/>
+          <a:p>
+            <a:pPr algn="l"/>
+            <a:r>
+              <a:rPr sz="1200" b="0">
+                <a:solidFill>
+                  <a:srgbClr val="1A1A1A"/>
+                </a:solidFill>
+              </a:rPr>
+              <a:t>▪  Alarm framing on a confirmation screen increases task abandonment. Calm copy + a neutral cancel</a:t>
+            </a:r>
+          </a:p>
+        </p:txBody>
+      </p:sp>
+      <p:sp>
+        <p:nvSpPr>
+          <p:cNvPr id="22" name="TextBox 21"/>
+          <p:cNvSpPr txBox="1"/>
+          <p:nvPr/>
+        </p:nvSpPr>
+        <p:spPr>
+          <a:xfrm>
+            <a:off x="640080" y="5484114"/>
+            <a:ext cx="10908792" cy="285750"/>
+          </a:xfrm>
+          <a:prstGeom prst="rect">
+            <a:avLst/>
+          </a:prstGeom>
+          <a:noFill/>
+        </p:spPr>
+        <p:txBody>
+          <a:bodyPr wrap="square" lIns="0" rIns="0" tIns="0" bIns="0">
+            <a:spAutoFit/>
+          </a:bodyPr>
+          <a:lstStyle/>
+          <a:p>
+            <a:pPr algn="l"/>
+            <a:r>
+              <a:rPr sz="1200" b="0">
+                <a:solidFill>
+                  <a:srgbClr val="1A1A1A"/>
+                </a:solidFill>
+              </a:rPr>
+              <a:t>▪  button reduce anxiety without hiding the escape hatch — a standard reassurance pattern.</a:t>
+            </a:r>
+          </a:p>
+        </p:txBody>
+      </p:sp>
+      <p:sp>
+        <p:nvSpPr>
+          <p:cNvPr id="23" name="Rectangle 22"/>
+          <p:cNvSpPr/>
+          <p:nvPr/>
+        </p:nvSpPr>
+        <p:spPr>
+          <a:xfrm>
+            <a:off x="457200" y="6217920"/>
+            <a:ext cx="11274552" cy="457200"/>
+          </a:xfrm>
+          <a:prstGeom prst="rect">
+            <a:avLst/>
+          </a:prstGeom>
+          <a:solidFill>
+            <a:srgbClr val="F5F0E8"/>
+          </a:solidFill>
+          <a:ln>
+            <a:noFill/>
+          </a:ln>
+        </p:spPr>
+        <p:style>
+          <a:lnRef idx="1">
+            <a:schemeClr val="accent1"/>
+          </a:lnRef>
+          <a:fillRef idx="3">
+            <a:schemeClr val="accent1"/>
+          </a:fillRef>
+          <a:effectRef idx="2">
+            <a:schemeClr val="accent1"/>
+          </a:effectRef>
+          <a:fontRef idx="minor">
+            <a:schemeClr val="lt1"/>
+          </a:fontRef>
+        </p:style>
+        <p:txBody>
+          <a:bodyPr rtlCol="0" anchor="ctr"/>
+          <a:lstStyle/>
+          <a:p>
+            <a:pPr algn="ctr"/>
+          </a:p>
+        </p:txBody>
+      </p:sp>
+      <p:sp>
+        <p:nvSpPr>
+          <p:cNvPr id="24" name="TextBox 23"/>
+          <p:cNvSpPr txBox="1"/>
+          <p:nvPr/>
+        </p:nvSpPr>
+        <p:spPr>
+          <a:xfrm>
+            <a:off x="640080" y="6263640"/>
+            <a:ext cx="11091672" cy="365760"/>
+          </a:xfrm>
+          <a:prstGeom prst="rect">
+            <a:avLst/>
+          </a:prstGeom>
+          <a:noFill/>
+        </p:spPr>
+        <p:txBody>
+          <a:bodyPr wrap="square" lIns="0" rIns="0" tIns="0" bIns="0">
+            <a:spAutoFit/>
+          </a:bodyPr>
+          <a:lstStyle/>
+          <a:p>
+            <a:pPr algn="l"/>
+            <a:r>
+              <a:rPr sz="1000" b="0">
+                <a:solidFill>
+                  <a:srgbClr val="78716C"/>
+                </a:solidFill>
+              </a:rPr>
+              <a:t>Session 2 · 23 Jun 2026  ·  VAT countdown overlay ~line 4998 (renderMtdSubmit)</a:t>
             </a:r>
           </a:p>
         </p:txBody>

--- a/Santander_June2026_Changes.pptx
+++ b/Santander_June2026_Changes.pptx
@@ -5569,7 +5569,7 @@
         <p:spPr>
           <a:xfrm>
             <a:off x="640080" y="6263640"/>
-            <a:ext cx="11091672" cy="365760"/>
+            <a:ext cx="6400000" cy="365760"/>
           </a:xfrm>
           <a:prstGeom prst="rect">
             <a:avLst/>
@@ -5590,6 +5590,40 @@
                 </a:solidFill>
               </a:rPr>
               <a:t>Session 2 · 23 Jun 2026  ·  forecast useMemo ~line 609, render block ~line 3207</a:t>
+            </a:r>
+          </a:p>
+        </p:txBody>
+      </p:sp>
+      <p:sp>
+        <p:nvSpPr>
+          <p:cNvPr id="24" name="TextBox 23"/>
+          <p:cNvSpPr txBox="1"/>
+          <p:nvPr/>
+        </p:nvSpPr>
+        <p:spPr>
+          <a:xfrm>
+            <a:off x="7231752" y="6263640"/>
+            <a:ext cx="4318000" cy="365760"/>
+          </a:xfrm>
+          <a:prstGeom prst="rect">
+            <a:avLst/>
+          </a:prstGeom>
+          <a:noFill/>
+        </p:spPr>
+        <p:txBody>
+          <a:bodyPr wrap="square" lIns="0" rIns="0" tIns="0" bIns="0">
+            <a:spAutoFit/>
+          </a:bodyPr>
+          <a:lstStyle/>
+          <a:p>
+            <a:pPr algn="r"/>
+            <a:r>
+              <a:rPr sz="900" b="1">
+                <a:solidFill>
+                  <a:srgbClr val="C8102E"/>
+                </a:solidFill>
+              </a:rPr>
+              <a:t>INTERNAL · CONFIDENTIAL   ·   A. Davidson · June 2026</a:t>
             </a:r>
           </a:p>
         </p:txBody>
@@ -6269,7 +6303,7 @@
         <p:spPr>
           <a:xfrm>
             <a:off x="640080" y="6263640"/>
-            <a:ext cx="11091672" cy="365760"/>
+            <a:ext cx="6400000" cy="365760"/>
           </a:xfrm>
           <a:prstGeom prst="rect">
             <a:avLst/>
@@ -6290,6 +6324,40 @@
                 </a:solidFill>
               </a:rPr>
               <a:t>Session 2 · 23 Jun 2026  ·  Card buttons render block ~line 2600 (SavingsSheet / card section)</a:t>
+            </a:r>
+          </a:p>
+        </p:txBody>
+      </p:sp>
+      <p:sp>
+        <p:nvSpPr>
+          <p:cNvPr id="21" name="TextBox 20"/>
+          <p:cNvSpPr txBox="1"/>
+          <p:nvPr/>
+        </p:nvSpPr>
+        <p:spPr>
+          <a:xfrm>
+            <a:off x="7231752" y="6263640"/>
+            <a:ext cx="4318000" cy="365760"/>
+          </a:xfrm>
+          <a:prstGeom prst="rect">
+            <a:avLst/>
+          </a:prstGeom>
+          <a:noFill/>
+        </p:spPr>
+        <p:txBody>
+          <a:bodyPr wrap="square" lIns="0" rIns="0" tIns="0" bIns="0">
+            <a:spAutoFit/>
+          </a:bodyPr>
+          <a:lstStyle/>
+          <a:p>
+            <a:pPr algn="r"/>
+            <a:r>
+              <a:rPr sz="900" b="1">
+                <a:solidFill>
+                  <a:srgbClr val="C8102E"/>
+                </a:solidFill>
+              </a:rPr>
+              <a:t>INTERNAL · CONFIDENTIAL   ·   A. Davidson · June 2026</a:t>
             </a:r>
           </a:p>
         </p:txBody>
@@ -7003,7 +7071,7 @@
         <p:spPr>
           <a:xfrm>
             <a:off x="640080" y="6263640"/>
-            <a:ext cx="11091672" cy="365760"/>
+            <a:ext cx="6400000" cy="365760"/>
           </a:xfrm>
           <a:prstGeom prst="rect">
             <a:avLst/>
@@ -7024,6 +7092,40 @@
                 </a:solidFill>
               </a:rPr>
               <a:t>Session 2 · 23 Jun 2026  ·  Biometric picker ~line 2390 (renderIdCheck / VoiceIdSheet)</a:t>
+            </a:r>
+          </a:p>
+        </p:txBody>
+      </p:sp>
+      <p:sp>
+        <p:nvSpPr>
+          <p:cNvPr id="22" name="TextBox 21"/>
+          <p:cNvSpPr txBox="1"/>
+          <p:nvPr/>
+        </p:nvSpPr>
+        <p:spPr>
+          <a:xfrm>
+            <a:off x="7231752" y="6263640"/>
+            <a:ext cx="4318000" cy="365760"/>
+          </a:xfrm>
+          <a:prstGeom prst="rect">
+            <a:avLst/>
+          </a:prstGeom>
+          <a:noFill/>
+        </p:spPr>
+        <p:txBody>
+          <a:bodyPr wrap="square" lIns="0" rIns="0" tIns="0" bIns="0">
+            <a:spAutoFit/>
+          </a:bodyPr>
+          <a:lstStyle/>
+          <a:p>
+            <a:pPr algn="r"/>
+            <a:r>
+              <a:rPr sz="900" b="1">
+                <a:solidFill>
+                  <a:srgbClr val="C8102E"/>
+                </a:solidFill>
+              </a:rPr>
+              <a:t>INTERNAL · CONFIDENTIAL   ·   A. Davidson · June 2026</a:t>
             </a:r>
           </a:p>
         </p:txBody>
@@ -7839,7 +7941,7 @@
         <p:spPr>
           <a:xfrm>
             <a:off x="640080" y="6263640"/>
-            <a:ext cx="11091672" cy="365760"/>
+            <a:ext cx="6400000" cy="365760"/>
           </a:xfrm>
           <a:prstGeom prst="rect">
             <a:avLst/>
@@ -7860,6 +7962,40 @@
                 </a:solidFill>
               </a:rPr>
               <a:t>Session 2 · 23 Jun 2026  ·  VAT countdown overlay ~line 4998 (renderMtdSubmit)</a:t>
+            </a:r>
+          </a:p>
+        </p:txBody>
+      </p:sp>
+      <p:sp>
+        <p:nvSpPr>
+          <p:cNvPr id="25" name="TextBox 24"/>
+          <p:cNvSpPr txBox="1"/>
+          <p:nvPr/>
+        </p:nvSpPr>
+        <p:spPr>
+          <a:xfrm>
+            <a:off x="7231752" y="6263640"/>
+            <a:ext cx="4318000" cy="365760"/>
+          </a:xfrm>
+          <a:prstGeom prst="rect">
+            <a:avLst/>
+          </a:prstGeom>
+          <a:noFill/>
+        </p:spPr>
+        <p:txBody>
+          <a:bodyPr wrap="square" lIns="0" rIns="0" tIns="0" bIns="0">
+            <a:spAutoFit/>
+          </a:bodyPr>
+          <a:lstStyle/>
+          <a:p>
+            <a:pPr algn="r"/>
+            <a:r>
+              <a:rPr sz="900" b="1">
+                <a:solidFill>
+                  <a:srgbClr val="C8102E"/>
+                </a:solidFill>
+              </a:rPr>
+              <a:t>INTERNAL · CONFIDENTIAL   ·   A. Davidson · June 2026</a:t>
             </a:r>
           </a:p>
         </p:txBody>

--- a/Santander_June2026_Changes.pptx
+++ b/Santander_June2026_Changes.pptx
@@ -3117,7 +3117,7 @@
             <a:avLst/>
           </a:prstGeom>
           <a:solidFill>
-            <a:srgbClr val="C8102E"/>
+            <a:srgbClr val="DA291C"/>
           </a:solidFill>
           <a:ln>
             <a:noFill/>
@@ -3425,7 +3425,7 @@
             <a:avLst/>
           </a:prstGeom>
           <a:solidFill>
-            <a:srgbClr val="C8102E"/>
+            <a:srgbClr val="DA291C"/>
           </a:solidFill>
           <a:ln>
             <a:noFill/>
@@ -3545,7 +3545,7 @@
             <a:avLst/>
           </a:prstGeom>
           <a:solidFill>
-            <a:srgbClr val="C8102E"/>
+            <a:srgbClr val="DA291C"/>
           </a:solidFill>
           <a:ln>
             <a:noFill/>
@@ -3599,7 +3599,7 @@
             <a:r>
               <a:rPr sz="1400" b="1">
                 <a:solidFill>
-                  <a:srgbClr val="C8102E"/>
+                  <a:srgbClr val="DA291C"/>
                 </a:solidFill>
               </a:rPr>
               <a:t>Background</a:t>
@@ -3735,7 +3735,7 @@
             <a:r>
               <a:rPr sz="1400" b="1">
                 <a:solidFill>
-                  <a:srgbClr val="C8102E"/>
+                  <a:srgbClr val="DA291C"/>
                 </a:solidFill>
               </a:rPr>
               <a:t>Fix</a:t>
@@ -3871,7 +3871,7 @@
             <a:r>
               <a:rPr sz="1400" b="1">
                 <a:solidFill>
-                  <a:srgbClr val="C8102E"/>
+                  <a:srgbClr val="DA291C"/>
                 </a:solidFill>
               </a:rPr>
               <a:t>Advisory note added</a:t>
@@ -4125,7 +4125,7 @@
             <a:avLst/>
           </a:prstGeom>
           <a:solidFill>
-            <a:srgbClr val="C8102E"/>
+            <a:srgbClr val="DA291C"/>
           </a:solidFill>
           <a:ln>
             <a:noFill/>
@@ -4245,7 +4245,7 @@
             <a:avLst/>
           </a:prstGeom>
           <a:solidFill>
-            <a:srgbClr val="C8102E"/>
+            <a:srgbClr val="DA291C"/>
           </a:solidFill>
           <a:ln>
             <a:noFill/>
@@ -4299,7 +4299,7 @@
             <a:r>
               <a:rPr sz="1400" b="1">
                 <a:solidFill>
-                  <a:srgbClr val="C8102E"/>
+                  <a:srgbClr val="DA291C"/>
                 </a:solidFill>
               </a:rPr>
               <a:t>Prototype architecture</a:t>
@@ -4435,7 +4435,7 @@
             <a:r>
               <a:rPr sz="1400" b="1">
                 <a:solidFill>
-                  <a:srgbClr val="C8102E"/>
+                  <a:srgbClr val="DA291C"/>
                 </a:solidFill>
               </a:rPr>
               <a:t>Known demo limitations (by design, not bugs)</a:t>
@@ -4605,7 +4605,7 @@
             <a:r>
               <a:rPr sz="1400" b="1">
                 <a:solidFill>
-                  <a:srgbClr val="C8102E"/>
+                  <a:srgbClr val="DA291C"/>
                 </a:solidFill>
               </a:rPr>
               <a:t>PowerPoint decks</a:t>
@@ -4825,7 +4825,7 @@
             <a:avLst/>
           </a:prstGeom>
           <a:solidFill>
-            <a:srgbClr val="C8102E"/>
+            <a:srgbClr val="DA291C"/>
           </a:solidFill>
           <a:ln>
             <a:noFill/>
@@ -4922,7 +4922,7 @@
             <a:r>
               <a:rPr sz="900" b="1">
                 <a:solidFill>
-                  <a:srgbClr val="C8102E"/>
+                  <a:srgbClr val="DA291C"/>
                 </a:solidFill>
               </a:rPr>
               <a:t>SESSION 2  —  23 June 2026</a:t>
@@ -5013,7 +5013,7 @@
             <a:avLst/>
           </a:prstGeom>
           <a:solidFill>
-            <a:srgbClr val="C8102E"/>
+            <a:srgbClr val="DA291C"/>
           </a:solidFill>
           <a:ln>
             <a:noFill/>
@@ -5067,7 +5067,7 @@
             <a:r>
               <a:rPr sz="1400" b="1">
                 <a:solidFill>
-                  <a:srgbClr val="C8102E"/>
+                  <a:srgbClr val="DA291C"/>
                 </a:solidFill>
               </a:rPr>
               <a:t>Before</a:t>
@@ -5237,7 +5237,7 @@
             <a:r>
               <a:rPr sz="1400" b="1">
                 <a:solidFill>
-                  <a:srgbClr val="C8102E"/>
+                  <a:srgbClr val="DA291C"/>
                 </a:solidFill>
               </a:rPr>
               <a:t>After</a:t>
@@ -5441,7 +5441,7 @@
             <a:r>
               <a:rPr sz="1400" b="1">
                 <a:solidFill>
-                  <a:srgbClr val="C8102E"/>
+                  <a:srgbClr val="DA291C"/>
                 </a:solidFill>
               </a:rPr>
               <a:t>Why it matters</a:t>
@@ -5620,7 +5620,7 @@
             <a:r>
               <a:rPr sz="900" b="1">
                 <a:solidFill>
-                  <a:srgbClr val="C8102E"/>
+                  <a:srgbClr val="DA291C"/>
                 </a:solidFill>
               </a:rPr>
               <a:t>INTERNAL · CONFIDENTIAL   ·   A. Davidson · June 2026</a:t>
@@ -5661,7 +5661,7 @@
             <a:avLst/>
           </a:prstGeom>
           <a:solidFill>
-            <a:srgbClr val="C8102E"/>
+            <a:srgbClr val="DA291C"/>
           </a:solidFill>
           <a:ln>
             <a:noFill/>
@@ -5758,7 +5758,7 @@
             <a:r>
               <a:rPr sz="900" b="1">
                 <a:solidFill>
-                  <a:srgbClr val="C8102E"/>
+                  <a:srgbClr val="DA291C"/>
                 </a:solidFill>
               </a:rPr>
               <a:t>SESSION 2  —  23 June 2026</a:t>
@@ -5849,7 +5849,7 @@
             <a:avLst/>
           </a:prstGeom>
           <a:solidFill>
-            <a:srgbClr val="C8102E"/>
+            <a:srgbClr val="DA291C"/>
           </a:solidFill>
           <a:ln>
             <a:noFill/>
@@ -5903,7 +5903,7 @@
             <a:r>
               <a:rPr sz="1400" b="1">
                 <a:solidFill>
-                  <a:srgbClr val="C8102E"/>
+                  <a:srgbClr val="DA291C"/>
                 </a:solidFill>
               </a:rPr>
               <a:t>Before</a:t>
@@ -6039,7 +6039,7 @@
             <a:r>
               <a:rPr sz="1400" b="1">
                 <a:solidFill>
-                  <a:srgbClr val="C8102E"/>
+                  <a:srgbClr val="DA291C"/>
                 </a:solidFill>
               </a:rPr>
               <a:t>After</a:t>
@@ -6175,7 +6175,7 @@
             <a:r>
               <a:rPr sz="1400" b="1">
                 <a:solidFill>
-                  <a:srgbClr val="C8102E"/>
+                  <a:srgbClr val="DA291C"/>
                 </a:solidFill>
               </a:rPr>
               <a:t>Why it matters</a:t>
@@ -6354,7 +6354,7 @@
             <a:r>
               <a:rPr sz="900" b="1">
                 <a:solidFill>
-                  <a:srgbClr val="C8102E"/>
+                  <a:srgbClr val="DA291C"/>
                 </a:solidFill>
               </a:rPr>
               <a:t>INTERNAL · CONFIDENTIAL   ·   A. Davidson · June 2026</a:t>
@@ -6395,7 +6395,7 @@
             <a:avLst/>
           </a:prstGeom>
           <a:solidFill>
-            <a:srgbClr val="C8102E"/>
+            <a:srgbClr val="DA291C"/>
           </a:solidFill>
           <a:ln>
             <a:noFill/>
@@ -6492,7 +6492,7 @@
             <a:r>
               <a:rPr sz="900" b="1">
                 <a:solidFill>
-                  <a:srgbClr val="C8102E"/>
+                  <a:srgbClr val="DA291C"/>
                 </a:solidFill>
               </a:rPr>
               <a:t>SESSION 2  —  23 June 2026</a:t>
@@ -6583,7 +6583,7 @@
             <a:avLst/>
           </a:prstGeom>
           <a:solidFill>
-            <a:srgbClr val="C8102E"/>
+            <a:srgbClr val="DA291C"/>
           </a:solidFill>
           <a:ln>
             <a:noFill/>
@@ -6637,7 +6637,7 @@
             <a:r>
               <a:rPr sz="1400" b="1">
                 <a:solidFill>
-                  <a:srgbClr val="C8102E"/>
+                  <a:srgbClr val="DA291C"/>
                 </a:solidFill>
               </a:rPr>
               <a:t>Before</a:t>
@@ -6773,7 +6773,7 @@
             <a:r>
               <a:rPr sz="1400" b="1">
                 <a:solidFill>
-                  <a:srgbClr val="C8102E"/>
+                  <a:srgbClr val="DA291C"/>
                 </a:solidFill>
               </a:rPr>
               <a:t>After</a:t>
@@ -6943,7 +6943,7 @@
             <a:r>
               <a:rPr sz="1400" b="1">
                 <a:solidFill>
-                  <a:srgbClr val="C8102E"/>
+                  <a:srgbClr val="DA291C"/>
                 </a:solidFill>
               </a:rPr>
               <a:t>Why it matters</a:t>
@@ -7122,7 +7122,7 @@
             <a:r>
               <a:rPr sz="900" b="1">
                 <a:solidFill>
-                  <a:srgbClr val="C8102E"/>
+                  <a:srgbClr val="DA291C"/>
                 </a:solidFill>
               </a:rPr>
               <a:t>INTERNAL · CONFIDENTIAL   ·   A. Davidson · June 2026</a:t>
@@ -7163,7 +7163,7 @@
             <a:avLst/>
           </a:prstGeom>
           <a:solidFill>
-            <a:srgbClr val="C8102E"/>
+            <a:srgbClr val="DA291C"/>
           </a:solidFill>
           <a:ln>
             <a:noFill/>
@@ -7260,7 +7260,7 @@
             <a:r>
               <a:rPr sz="900" b="1">
                 <a:solidFill>
-                  <a:srgbClr val="C8102E"/>
+                  <a:srgbClr val="DA291C"/>
                 </a:solidFill>
               </a:rPr>
               <a:t>SESSION 2  —  23 June 2026</a:t>
@@ -7351,7 +7351,7 @@
             <a:avLst/>
           </a:prstGeom>
           <a:solidFill>
-            <a:srgbClr val="C8102E"/>
+            <a:srgbClr val="DA291C"/>
           </a:solidFill>
           <a:ln>
             <a:noFill/>
@@ -7405,7 +7405,7 @@
             <a:r>
               <a:rPr sz="1400" b="1">
                 <a:solidFill>
-                  <a:srgbClr val="C8102E"/>
+                  <a:srgbClr val="DA291C"/>
                 </a:solidFill>
               </a:rPr>
               <a:t>Before</a:t>
@@ -7575,7 +7575,7 @@
             <a:r>
               <a:rPr sz="1400" b="1">
                 <a:solidFill>
-                  <a:srgbClr val="C8102E"/>
+                  <a:srgbClr val="DA291C"/>
                 </a:solidFill>
               </a:rPr>
               <a:t>After</a:t>
@@ -7813,7 +7813,7 @@
             <a:r>
               <a:rPr sz="1400" b="1">
                 <a:solidFill>
-                  <a:srgbClr val="C8102E"/>
+                  <a:srgbClr val="DA291C"/>
                 </a:solidFill>
               </a:rPr>
               <a:t>Why it matters</a:t>
@@ -7992,7 +7992,7 @@
             <a:r>
               <a:rPr sz="900" b="1">
                 <a:solidFill>
-                  <a:srgbClr val="C8102E"/>
+                  <a:srgbClr val="DA291C"/>
                 </a:solidFill>
               </a:rPr>
               <a:t>INTERNAL · CONFIDENTIAL   ·   A. Davidson · June 2026</a:t>
@@ -8033,7 +8033,7 @@
             <a:avLst/>
           </a:prstGeom>
           <a:solidFill>
-            <a:srgbClr val="C8102E"/>
+            <a:srgbClr val="DA291C"/>
           </a:solidFill>
           <a:ln>
             <a:noFill/>
@@ -8205,7 +8205,7 @@
             <a:avLst/>
           </a:prstGeom>
           <a:solidFill>
-            <a:srgbClr val="C8102E"/>
+            <a:srgbClr val="DA291C"/>
           </a:solidFill>
           <a:ln>
             <a:noFill/>
@@ -8325,7 +8325,7 @@
             <a:avLst/>
           </a:prstGeom>
           <a:solidFill>
-            <a:srgbClr val="C8102E"/>
+            <a:srgbClr val="DA291C"/>
           </a:solidFill>
           <a:ln>
             <a:noFill/>
@@ -8379,7 +8379,7 @@
             <a:r>
               <a:rPr sz="1400" b="1">
                 <a:solidFill>
-                  <a:srgbClr val="C8102E"/>
+                  <a:srgbClr val="DA291C"/>
                 </a:solidFill>
               </a:rPr>
               <a:t>The Problem</a:t>
@@ -8515,7 +8515,7 @@
             <a:r>
               <a:rPr sz="1400" b="1">
                 <a:solidFill>
-                  <a:srgbClr val="C8102E"/>
+                  <a:srgbClr val="DA291C"/>
                 </a:solidFill>
               </a:rPr>
               <a:t>The Fix</a:t>
@@ -8719,7 +8719,7 @@
             <a:r>
               <a:rPr sz="1400" b="1">
                 <a:solidFill>
-                  <a:srgbClr val="C8102E"/>
+                  <a:srgbClr val="DA291C"/>
                 </a:solidFill>
               </a:rPr>
               <a:t>Result</a:t>
@@ -8871,7 +8871,7 @@
             <a:avLst/>
           </a:prstGeom>
           <a:solidFill>
-            <a:srgbClr val="C8102E"/>
+            <a:srgbClr val="DA291C"/>
           </a:solidFill>
           <a:ln>
             <a:noFill/>
@@ -8991,7 +8991,7 @@
             <a:avLst/>
           </a:prstGeom>
           <a:solidFill>
-            <a:srgbClr val="C8102E"/>
+            <a:srgbClr val="DA291C"/>
           </a:solidFill>
           <a:ln>
             <a:noFill/>
@@ -9045,7 +9045,7 @@
             <a:r>
               <a:rPr sz="1400" b="1">
                 <a:solidFill>
-                  <a:srgbClr val="C8102E"/>
+                  <a:srgbClr val="DA291C"/>
                 </a:solidFill>
               </a:rPr>
               <a:t>The Gap</a:t>
@@ -9147,7 +9147,7 @@
             <a:r>
               <a:rPr sz="1400" b="1">
                 <a:solidFill>
-                  <a:srgbClr val="C8102E"/>
+                  <a:srgbClr val="DA291C"/>
                 </a:solidFill>
               </a:rPr>
               <a:t>The Fix</a:t>
@@ -9283,7 +9283,7 @@
             <a:r>
               <a:rPr sz="1400" b="1">
                 <a:solidFill>
-                  <a:srgbClr val="C8102E"/>
+                  <a:srgbClr val="DA291C"/>
                 </a:solidFill>
               </a:rPr>
               <a:t>Result</a:t>
@@ -9435,7 +9435,7 @@
             <a:avLst/>
           </a:prstGeom>
           <a:solidFill>
-            <a:srgbClr val="C8102E"/>
+            <a:srgbClr val="DA291C"/>
           </a:solidFill>
           <a:ln>
             <a:noFill/>
@@ -9555,7 +9555,7 @@
             <a:avLst/>
           </a:prstGeom>
           <a:solidFill>
-            <a:srgbClr val="C8102E"/>
+            <a:srgbClr val="DA291C"/>
           </a:solidFill>
           <a:ln>
             <a:noFill/>
@@ -9609,7 +9609,7 @@
             <a:r>
               <a:rPr sz="1400" b="1">
                 <a:solidFill>
-                  <a:srgbClr val="C8102E"/>
+                  <a:srgbClr val="DA291C"/>
                 </a:solidFill>
               </a:rPr>
               <a:t>Previous State</a:t>
@@ -9677,7 +9677,7 @@
             <a:r>
               <a:rPr sz="1400" b="1">
                 <a:solidFill>
-                  <a:srgbClr val="C8102E"/>
+                  <a:srgbClr val="DA291C"/>
                 </a:solidFill>
               </a:rPr>
               <a:t>Updated</a:t>
@@ -9983,7 +9983,7 @@
             <a:r>
               <a:rPr sz="1400" b="1">
                 <a:solidFill>
-                  <a:srgbClr val="C8102E"/>
+                  <a:srgbClr val="DA291C"/>
                 </a:solidFill>
               </a:rPr>
               <a:t>Result</a:t>
@@ -10135,7 +10135,7 @@
             <a:avLst/>
           </a:prstGeom>
           <a:solidFill>
-            <a:srgbClr val="C8102E"/>
+            <a:srgbClr val="DA291C"/>
           </a:solidFill>
           <a:ln>
             <a:noFill/>
@@ -10255,7 +10255,7 @@
             <a:avLst/>
           </a:prstGeom>
           <a:solidFill>
-            <a:srgbClr val="C8102E"/>
+            <a:srgbClr val="DA291C"/>
           </a:solidFill>
           <a:ln>
             <a:noFill/>
@@ -10309,7 +10309,7 @@
             <a:r>
               <a:rPr sz="1400" b="1">
                 <a:solidFill>
-                  <a:srgbClr val="C8102E"/>
+                  <a:srgbClr val="DA291C"/>
                 </a:solidFill>
               </a:rPr>
               <a:t>Problem</a:t>
@@ -10411,7 +10411,7 @@
             <a:r>
               <a:rPr sz="1400" b="1">
                 <a:solidFill>
-                  <a:srgbClr val="C8102E"/>
+                  <a:srgbClr val="DA291C"/>
                 </a:solidFill>
               </a:rPr>
               <a:t>Solution</a:t>
@@ -10581,7 +10581,7 @@
             <a:r>
               <a:rPr sz="1400" b="1">
                 <a:solidFill>
-                  <a:srgbClr val="C8102E"/>
+                  <a:srgbClr val="DA291C"/>
                 </a:solidFill>
               </a:rPr>
               <a:t>How to use</a:t>
@@ -10767,7 +10767,7 @@
             <a:avLst/>
           </a:prstGeom>
           <a:solidFill>
-            <a:srgbClr val="C8102E"/>
+            <a:srgbClr val="DA291C"/>
           </a:solidFill>
           <a:ln>
             <a:noFill/>
@@ -10939,7 +10939,7 @@
             <a:avLst/>
           </a:prstGeom>
           <a:solidFill>
-            <a:srgbClr val="C8102E"/>
+            <a:srgbClr val="DA291C"/>
           </a:solidFill>
           <a:ln>
             <a:noFill/>
@@ -11059,7 +11059,7 @@
             <a:avLst/>
           </a:prstGeom>
           <a:solidFill>
-            <a:srgbClr val="C8102E"/>
+            <a:srgbClr val="DA291C"/>
           </a:solidFill>
           <a:ln>
             <a:noFill/>
@@ -11113,7 +11113,7 @@
             <a:r>
               <a:rPr sz="1400" b="1">
                 <a:solidFill>
-                  <a:srgbClr val="C8102E"/>
+                  <a:srgbClr val="DA291C"/>
                 </a:solidFill>
               </a:rPr>
               <a:t>What was stale</a:t>
@@ -11385,7 +11385,7 @@
             <a:r>
               <a:rPr sz="1400" b="1">
                 <a:solidFill>
-                  <a:srgbClr val="C8102E"/>
+                  <a:srgbClr val="DA291C"/>
                 </a:solidFill>
               </a:rPr>
               <a:t>What was added</a:t>
@@ -11639,7 +11639,7 @@
             <a:avLst/>
           </a:prstGeom>
           <a:solidFill>
-            <a:srgbClr val="C8102E"/>
+            <a:srgbClr val="DA291C"/>
           </a:solidFill>
           <a:ln>
             <a:noFill/>
@@ -11759,7 +11759,7 @@
             <a:avLst/>
           </a:prstGeom>
           <a:solidFill>
-            <a:srgbClr val="C8102E"/>
+            <a:srgbClr val="DA291C"/>
           </a:solidFill>
           <a:ln>
             <a:noFill/>
@@ -11813,7 +11813,7 @@
             <a:r>
               <a:rPr sz="1400" b="1">
                 <a:solidFill>
-                  <a:srgbClr val="C8102E"/>
+                  <a:srgbClr val="DA291C"/>
                 </a:solidFill>
               </a:rPr>
               <a:t>Previous state: 52 sections · ~9,800 lines · 66 books</a:t>
@@ -11847,7 +11847,7 @@
             <a:r>
               <a:rPr sz="1400" b="1">
                 <a:solidFill>
-                  <a:srgbClr val="C8102E"/>
+                  <a:srgbClr val="DA291C"/>
                 </a:solidFill>
               </a:rPr>
               <a:t>Added in this session:</a:t>
@@ -12051,7 +12051,7 @@
             <a:r>
               <a:rPr sz="1400" b="1">
                 <a:solidFill>
-                  <a:srgbClr val="C8102E"/>
+                  <a:srgbClr val="DA291C"/>
                 </a:solidFill>
               </a:rPr>
               <a:t>Current state: 57 sections · 12,523 lines · 71 books</a:t>

--- a/Santander_June2026_Changes.pptx
+++ b/Santander_June2026_Changes.pptx
@@ -3224,40 +3224,6 @@
       </p:sp>
       <p:sp>
         <p:nvSpPr>
-          <p:cNvPr id="5" name="TextBox 4"/>
-          <p:cNvSpPr txBox="1"/>
-          <p:nvPr/>
-        </p:nvSpPr>
-        <p:spPr>
-          <a:xfrm>
-            <a:off x="1280160" y="411480"/>
-            <a:ext cx="4572000" cy="457200"/>
-          </a:xfrm>
-          <a:prstGeom prst="rect">
-            <a:avLst/>
-          </a:prstGeom>
-          <a:noFill/>
-        </p:spPr>
-        <p:txBody>
-          <a:bodyPr wrap="square">
-            <a:spAutoFit/>
-          </a:bodyPr>
-          <a:lstStyle/>
-          <a:p>
-            <a:pPr algn="l"/>
-            <a:r>
-              <a:rPr sz="1400" b="1">
-                <a:solidFill>
-                  <a:srgbClr val="FFFFFF"/>
-                </a:solidFill>
-              </a:rPr>
-              <a:t>SANTANDER</a:t>
-            </a:r>
-          </a:p>
-        </p:txBody>
-      </p:sp>
-      <p:sp>
-        <p:nvSpPr>
           <p:cNvPr id="6" name="TextBox 5"/>
           <p:cNvSpPr txBox="1"/>
           <p:nvPr/>
@@ -3392,6 +3358,30 @@
           </a:p>
         </p:txBody>
       </p:sp>
+      <p:pic>
+        <p:nvPicPr>
+          <p:cNvPr id="10" name="Santander logo" descr="santander-logo-white.png"/>
+          <p:cNvPicPr>
+            <a:picLocks noChangeAspect="1"/>
+          </p:cNvPicPr>
+          <p:nvPr/>
+        </p:nvPicPr>
+        <p:blipFill>
+          <a:blip r:embed="rId2"/>
+          <a:stretch>
+            <a:fillRect/>
+          </a:stretch>
+        </p:blipFill>
+        <p:spPr>
+          <a:xfrm>
+            <a:off x="502920" y="457200"/>
+            <a:ext cx="2377440" cy="411297"/>
+          </a:xfrm>
+          <a:prstGeom prst="rect">
+            <a:avLst/>
+          </a:prstGeom>
+        </p:spPr>
+      </p:pic>
     </p:spTree>
   </p:cSld>
   <p:clrMapOvr>

--- a/Santander_June2026_Changes.pptx
+++ b/Santander_June2026_Changes.pptx
@@ -3185,74 +3185,6 @@
           <a:lstStyle/>
           <a:p>
             <a:pPr algn="ctr"/>
-          </a:p>
-        </p:txBody>
-      </p:sp>
-      <p:sp>
-        <p:nvSpPr>
-          <p:cNvPr id="4" name="TextBox 3"/>
-          <p:cNvSpPr txBox="1"/>
-          <p:nvPr/>
-        </p:nvSpPr>
-        <p:spPr>
-          <a:xfrm>
-            <a:off x="502920" y="365760"/>
-            <a:ext cx="914400" cy="640080"/>
-          </a:xfrm>
-          <a:prstGeom prst="rect">
-            <a:avLst/>
-          </a:prstGeom>
-          <a:noFill/>
-        </p:spPr>
-        <p:txBody>
-          <a:bodyPr wrap="square">
-            <a:spAutoFit/>
-          </a:bodyPr>
-          <a:lstStyle/>
-          <a:p>
-            <a:pPr algn="l"/>
-            <a:r>
-              <a:rPr sz="3600" b="0">
-                <a:solidFill>
-                  <a:srgbClr val="FFFFFF"/>
-                </a:solidFill>
-              </a:rPr>
-              <a:t>🔥</a:t>
-            </a:r>
-          </a:p>
-        </p:txBody>
-      </p:sp>
-      <p:sp>
-        <p:nvSpPr>
-          <p:cNvPr id="6" name="TextBox 5"/>
-          <p:cNvSpPr txBox="1"/>
-          <p:nvPr/>
-        </p:nvSpPr>
-        <p:spPr>
-          <a:xfrm>
-            <a:off x="1280160" y="777240"/>
-            <a:ext cx="4572000" cy="365760"/>
-          </a:xfrm>
-          <a:prstGeom prst="rect">
-            <a:avLst/>
-          </a:prstGeom>
-          <a:noFill/>
-        </p:spPr>
-        <p:txBody>
-          <a:bodyPr wrap="square">
-            <a:spAutoFit/>
-          </a:bodyPr>
-          <a:lstStyle/>
-          <a:p>
-            <a:pPr algn="l"/>
-            <a:r>
-              <a:rPr sz="1000" b="0">
-                <a:solidFill>
-                  <a:srgbClr val="FF8080"/>
-                </a:solidFill>
-              </a:rPr>
-              <a:t>BUSINESS BANKING</a:t>
-            </a:r>
           </a:p>
         </p:txBody>
       </p:sp>

--- a/Santander_June2026_Changes.pptx
+++ b/Santander_June2026_Changes.pptx
@@ -3117,7 +3117,7 @@
             <a:avLst/>
           </a:prstGeom>
           <a:solidFill>
-            <a:srgbClr val="DA291C"/>
+            <a:srgbClr val="EC0000"/>
           </a:solidFill>
           <a:ln>
             <a:noFill/>
@@ -3347,7 +3347,7 @@
             <a:avLst/>
           </a:prstGeom>
           <a:solidFill>
-            <a:srgbClr val="DA291C"/>
+            <a:srgbClr val="EC0000"/>
           </a:solidFill>
           <a:ln>
             <a:noFill/>
@@ -3390,7 +3390,7 @@
             <a:avLst/>
           </a:prstGeom>
           <a:solidFill>
-            <a:srgbClr val="FAF6EF"/>
+            <a:srgbClr val="FBF1EA"/>
           </a:solidFill>
           <a:ln>
             <a:noFill/>
@@ -3467,7 +3467,7 @@
             <a:avLst/>
           </a:prstGeom>
           <a:solidFill>
-            <a:srgbClr val="DA291C"/>
+            <a:srgbClr val="EC0000"/>
           </a:solidFill>
           <a:ln>
             <a:noFill/>
@@ -3521,7 +3521,7 @@
             <a:r>
               <a:rPr sz="1400" b="1">
                 <a:solidFill>
-                  <a:srgbClr val="DA291C"/>
+                  <a:srgbClr val="EC0000"/>
                 </a:solidFill>
               </a:rPr>
               <a:t>Background</a:t>
@@ -3657,7 +3657,7 @@
             <a:r>
               <a:rPr sz="1400" b="1">
                 <a:solidFill>
-                  <a:srgbClr val="DA291C"/>
+                  <a:srgbClr val="EC0000"/>
                 </a:solidFill>
               </a:rPr>
               <a:t>Fix</a:t>
@@ -3793,7 +3793,7 @@
             <a:r>
               <a:rPr sz="1400" b="1">
                 <a:solidFill>
-                  <a:srgbClr val="DA291C"/>
+                  <a:srgbClr val="EC0000"/>
                 </a:solidFill>
               </a:rPr>
               <a:t>Advisory note added</a:t>
@@ -4047,7 +4047,7 @@
             <a:avLst/>
           </a:prstGeom>
           <a:solidFill>
-            <a:srgbClr val="DA291C"/>
+            <a:srgbClr val="EC0000"/>
           </a:solidFill>
           <a:ln>
             <a:noFill/>
@@ -4090,7 +4090,7 @@
             <a:avLst/>
           </a:prstGeom>
           <a:solidFill>
-            <a:srgbClr val="FAF6EF"/>
+            <a:srgbClr val="FBF1EA"/>
           </a:solidFill>
           <a:ln>
             <a:noFill/>
@@ -4167,7 +4167,7 @@
             <a:avLst/>
           </a:prstGeom>
           <a:solidFill>
-            <a:srgbClr val="DA291C"/>
+            <a:srgbClr val="EC0000"/>
           </a:solidFill>
           <a:ln>
             <a:noFill/>
@@ -4221,7 +4221,7 @@
             <a:r>
               <a:rPr sz="1400" b="1">
                 <a:solidFill>
-                  <a:srgbClr val="DA291C"/>
+                  <a:srgbClr val="EC0000"/>
                 </a:solidFill>
               </a:rPr>
               <a:t>Prototype architecture</a:t>
@@ -4357,7 +4357,7 @@
             <a:r>
               <a:rPr sz="1400" b="1">
                 <a:solidFill>
-                  <a:srgbClr val="DA291C"/>
+                  <a:srgbClr val="EC0000"/>
                 </a:solidFill>
               </a:rPr>
               <a:t>Known demo limitations (by design, not bugs)</a:t>
@@ -4527,7 +4527,7 @@
             <a:r>
               <a:rPr sz="1400" b="1">
                 <a:solidFill>
-                  <a:srgbClr val="DA291C"/>
+                  <a:srgbClr val="EC0000"/>
                 </a:solidFill>
               </a:rPr>
               <a:t>PowerPoint decks</a:t>
@@ -4747,7 +4747,7 @@
             <a:avLst/>
           </a:prstGeom>
           <a:solidFill>
-            <a:srgbClr val="DA291C"/>
+            <a:srgbClr val="EC0000"/>
           </a:solidFill>
           <a:ln>
             <a:noFill/>
@@ -4790,7 +4790,7 @@
             <a:avLst/>
           </a:prstGeom>
           <a:solidFill>
-            <a:srgbClr val="FAF6EF"/>
+            <a:srgbClr val="FBF1EA"/>
           </a:solidFill>
           <a:ln>
             <a:noFill/>
@@ -4844,7 +4844,7 @@
             <a:r>
               <a:rPr sz="900" b="1">
                 <a:solidFill>
-                  <a:srgbClr val="DA291C"/>
+                  <a:srgbClr val="EC0000"/>
                 </a:solidFill>
               </a:rPr>
               <a:t>SESSION 2  —  23 June 2026</a:t>
@@ -4935,7 +4935,7 @@
             <a:avLst/>
           </a:prstGeom>
           <a:solidFill>
-            <a:srgbClr val="DA291C"/>
+            <a:srgbClr val="EC0000"/>
           </a:solidFill>
           <a:ln>
             <a:noFill/>
@@ -4989,7 +4989,7 @@
             <a:r>
               <a:rPr sz="1400" b="1">
                 <a:solidFill>
-                  <a:srgbClr val="DA291C"/>
+                  <a:srgbClr val="EC0000"/>
                 </a:solidFill>
               </a:rPr>
               <a:t>Before</a:t>
@@ -5159,7 +5159,7 @@
             <a:r>
               <a:rPr sz="1400" b="1">
                 <a:solidFill>
-                  <a:srgbClr val="DA291C"/>
+                  <a:srgbClr val="EC0000"/>
                 </a:solidFill>
               </a:rPr>
               <a:t>After</a:t>
@@ -5363,7 +5363,7 @@
             <a:r>
               <a:rPr sz="1400" b="1">
                 <a:solidFill>
-                  <a:srgbClr val="DA291C"/>
+                  <a:srgbClr val="EC0000"/>
                 </a:solidFill>
               </a:rPr>
               <a:t>Why it matters</a:t>
@@ -5542,7 +5542,7 @@
             <a:r>
               <a:rPr sz="900" b="1">
                 <a:solidFill>
-                  <a:srgbClr val="DA291C"/>
+                  <a:srgbClr val="EC0000"/>
                 </a:solidFill>
               </a:rPr>
               <a:t>INTERNAL · CONFIDENTIAL   ·   A. Davidson · June 2026</a:t>
@@ -5583,7 +5583,7 @@
             <a:avLst/>
           </a:prstGeom>
           <a:solidFill>
-            <a:srgbClr val="DA291C"/>
+            <a:srgbClr val="EC0000"/>
           </a:solidFill>
           <a:ln>
             <a:noFill/>
@@ -5626,7 +5626,7 @@
             <a:avLst/>
           </a:prstGeom>
           <a:solidFill>
-            <a:srgbClr val="FAF6EF"/>
+            <a:srgbClr val="FBF1EA"/>
           </a:solidFill>
           <a:ln>
             <a:noFill/>
@@ -5680,7 +5680,7 @@
             <a:r>
               <a:rPr sz="900" b="1">
                 <a:solidFill>
-                  <a:srgbClr val="DA291C"/>
+                  <a:srgbClr val="EC0000"/>
                 </a:solidFill>
               </a:rPr>
               <a:t>SESSION 2  —  23 June 2026</a:t>
@@ -5771,7 +5771,7 @@
             <a:avLst/>
           </a:prstGeom>
           <a:solidFill>
-            <a:srgbClr val="DA291C"/>
+            <a:srgbClr val="EC0000"/>
           </a:solidFill>
           <a:ln>
             <a:noFill/>
@@ -5825,7 +5825,7 @@
             <a:r>
               <a:rPr sz="1400" b="1">
                 <a:solidFill>
-                  <a:srgbClr val="DA291C"/>
+                  <a:srgbClr val="EC0000"/>
                 </a:solidFill>
               </a:rPr>
               <a:t>Before</a:t>
@@ -5961,7 +5961,7 @@
             <a:r>
               <a:rPr sz="1400" b="1">
                 <a:solidFill>
-                  <a:srgbClr val="DA291C"/>
+                  <a:srgbClr val="EC0000"/>
                 </a:solidFill>
               </a:rPr>
               <a:t>After</a:t>
@@ -6097,7 +6097,7 @@
             <a:r>
               <a:rPr sz="1400" b="1">
                 <a:solidFill>
-                  <a:srgbClr val="DA291C"/>
+                  <a:srgbClr val="EC0000"/>
                 </a:solidFill>
               </a:rPr>
               <a:t>Why it matters</a:t>
@@ -6276,7 +6276,7 @@
             <a:r>
               <a:rPr sz="900" b="1">
                 <a:solidFill>
-                  <a:srgbClr val="DA291C"/>
+                  <a:srgbClr val="EC0000"/>
                 </a:solidFill>
               </a:rPr>
               <a:t>INTERNAL · CONFIDENTIAL   ·   A. Davidson · June 2026</a:t>
@@ -6317,7 +6317,7 @@
             <a:avLst/>
           </a:prstGeom>
           <a:solidFill>
-            <a:srgbClr val="DA291C"/>
+            <a:srgbClr val="EC0000"/>
           </a:solidFill>
           <a:ln>
             <a:noFill/>
@@ -6360,7 +6360,7 @@
             <a:avLst/>
           </a:prstGeom>
           <a:solidFill>
-            <a:srgbClr val="FAF6EF"/>
+            <a:srgbClr val="FBF1EA"/>
           </a:solidFill>
           <a:ln>
             <a:noFill/>
@@ -6414,7 +6414,7 @@
             <a:r>
               <a:rPr sz="900" b="1">
                 <a:solidFill>
-                  <a:srgbClr val="DA291C"/>
+                  <a:srgbClr val="EC0000"/>
                 </a:solidFill>
               </a:rPr>
               <a:t>SESSION 2  —  23 June 2026</a:t>
@@ -6505,7 +6505,7 @@
             <a:avLst/>
           </a:prstGeom>
           <a:solidFill>
-            <a:srgbClr val="DA291C"/>
+            <a:srgbClr val="EC0000"/>
           </a:solidFill>
           <a:ln>
             <a:noFill/>
@@ -6559,7 +6559,7 @@
             <a:r>
               <a:rPr sz="1400" b="1">
                 <a:solidFill>
-                  <a:srgbClr val="DA291C"/>
+                  <a:srgbClr val="EC0000"/>
                 </a:solidFill>
               </a:rPr>
               <a:t>Before</a:t>
@@ -6695,7 +6695,7 @@
             <a:r>
               <a:rPr sz="1400" b="1">
                 <a:solidFill>
-                  <a:srgbClr val="DA291C"/>
+                  <a:srgbClr val="EC0000"/>
                 </a:solidFill>
               </a:rPr>
               <a:t>After</a:t>
@@ -6865,7 +6865,7 @@
             <a:r>
               <a:rPr sz="1400" b="1">
                 <a:solidFill>
-                  <a:srgbClr val="DA291C"/>
+                  <a:srgbClr val="EC0000"/>
                 </a:solidFill>
               </a:rPr>
               <a:t>Why it matters</a:t>
@@ -7044,7 +7044,7 @@
             <a:r>
               <a:rPr sz="900" b="1">
                 <a:solidFill>
-                  <a:srgbClr val="DA291C"/>
+                  <a:srgbClr val="EC0000"/>
                 </a:solidFill>
               </a:rPr>
               <a:t>INTERNAL · CONFIDENTIAL   ·   A. Davidson · June 2026</a:t>
@@ -7085,7 +7085,7 @@
             <a:avLst/>
           </a:prstGeom>
           <a:solidFill>
-            <a:srgbClr val="DA291C"/>
+            <a:srgbClr val="EC0000"/>
           </a:solidFill>
           <a:ln>
             <a:noFill/>
@@ -7128,7 +7128,7 @@
             <a:avLst/>
           </a:prstGeom>
           <a:solidFill>
-            <a:srgbClr val="FAF6EF"/>
+            <a:srgbClr val="FBF1EA"/>
           </a:solidFill>
           <a:ln>
             <a:noFill/>
@@ -7182,7 +7182,7 @@
             <a:r>
               <a:rPr sz="900" b="1">
                 <a:solidFill>
-                  <a:srgbClr val="DA291C"/>
+                  <a:srgbClr val="EC0000"/>
                 </a:solidFill>
               </a:rPr>
               <a:t>SESSION 2  —  23 June 2026</a:t>
@@ -7273,7 +7273,7 @@
             <a:avLst/>
           </a:prstGeom>
           <a:solidFill>
-            <a:srgbClr val="DA291C"/>
+            <a:srgbClr val="EC0000"/>
           </a:solidFill>
           <a:ln>
             <a:noFill/>
@@ -7327,7 +7327,7 @@
             <a:r>
               <a:rPr sz="1400" b="1">
                 <a:solidFill>
-                  <a:srgbClr val="DA291C"/>
+                  <a:srgbClr val="EC0000"/>
                 </a:solidFill>
               </a:rPr>
               <a:t>Before</a:t>
@@ -7497,7 +7497,7 @@
             <a:r>
               <a:rPr sz="1400" b="1">
                 <a:solidFill>
-                  <a:srgbClr val="DA291C"/>
+                  <a:srgbClr val="EC0000"/>
                 </a:solidFill>
               </a:rPr>
               <a:t>After</a:t>
@@ -7735,7 +7735,7 @@
             <a:r>
               <a:rPr sz="1400" b="1">
                 <a:solidFill>
-                  <a:srgbClr val="DA291C"/>
+                  <a:srgbClr val="EC0000"/>
                 </a:solidFill>
               </a:rPr>
               <a:t>Why it matters</a:t>
@@ -7914,7 +7914,7 @@
             <a:r>
               <a:rPr sz="900" b="1">
                 <a:solidFill>
-                  <a:srgbClr val="DA291C"/>
+                  <a:srgbClr val="EC0000"/>
                 </a:solidFill>
               </a:rPr>
               <a:t>INTERNAL · CONFIDENTIAL   ·   A. Davidson · June 2026</a:t>
@@ -7955,7 +7955,7 @@
             <a:avLst/>
           </a:prstGeom>
           <a:solidFill>
-            <a:srgbClr val="DA291C"/>
+            <a:srgbClr val="EC0000"/>
           </a:solidFill>
           <a:ln>
             <a:noFill/>
@@ -8127,7 +8127,7 @@
             <a:avLst/>
           </a:prstGeom>
           <a:solidFill>
-            <a:srgbClr val="DA291C"/>
+            <a:srgbClr val="EC0000"/>
           </a:solidFill>
           <a:ln>
             <a:noFill/>
@@ -8170,7 +8170,7 @@
             <a:avLst/>
           </a:prstGeom>
           <a:solidFill>
-            <a:srgbClr val="FAF6EF"/>
+            <a:srgbClr val="FBF1EA"/>
           </a:solidFill>
           <a:ln>
             <a:noFill/>
@@ -8247,7 +8247,7 @@
             <a:avLst/>
           </a:prstGeom>
           <a:solidFill>
-            <a:srgbClr val="DA291C"/>
+            <a:srgbClr val="EC0000"/>
           </a:solidFill>
           <a:ln>
             <a:noFill/>
@@ -8301,7 +8301,7 @@
             <a:r>
               <a:rPr sz="1400" b="1">
                 <a:solidFill>
-                  <a:srgbClr val="DA291C"/>
+                  <a:srgbClr val="EC0000"/>
                 </a:solidFill>
               </a:rPr>
               <a:t>The Problem</a:t>
@@ -8437,7 +8437,7 @@
             <a:r>
               <a:rPr sz="1400" b="1">
                 <a:solidFill>
-                  <a:srgbClr val="DA291C"/>
+                  <a:srgbClr val="EC0000"/>
                 </a:solidFill>
               </a:rPr>
               <a:t>The Fix</a:t>
@@ -8641,7 +8641,7 @@
             <a:r>
               <a:rPr sz="1400" b="1">
                 <a:solidFill>
-                  <a:srgbClr val="DA291C"/>
+                  <a:srgbClr val="EC0000"/>
                 </a:solidFill>
               </a:rPr>
               <a:t>Result</a:t>
@@ -8793,7 +8793,7 @@
             <a:avLst/>
           </a:prstGeom>
           <a:solidFill>
-            <a:srgbClr val="DA291C"/>
+            <a:srgbClr val="EC0000"/>
           </a:solidFill>
           <a:ln>
             <a:noFill/>
@@ -8836,7 +8836,7 @@
             <a:avLst/>
           </a:prstGeom>
           <a:solidFill>
-            <a:srgbClr val="FAF6EF"/>
+            <a:srgbClr val="FBF1EA"/>
           </a:solidFill>
           <a:ln>
             <a:noFill/>
@@ -8913,7 +8913,7 @@
             <a:avLst/>
           </a:prstGeom>
           <a:solidFill>
-            <a:srgbClr val="DA291C"/>
+            <a:srgbClr val="EC0000"/>
           </a:solidFill>
           <a:ln>
             <a:noFill/>
@@ -8967,7 +8967,7 @@
             <a:r>
               <a:rPr sz="1400" b="1">
                 <a:solidFill>
-                  <a:srgbClr val="DA291C"/>
+                  <a:srgbClr val="EC0000"/>
                 </a:solidFill>
               </a:rPr>
               <a:t>The Gap</a:t>
@@ -9069,7 +9069,7 @@
             <a:r>
               <a:rPr sz="1400" b="1">
                 <a:solidFill>
-                  <a:srgbClr val="DA291C"/>
+                  <a:srgbClr val="EC0000"/>
                 </a:solidFill>
               </a:rPr>
               <a:t>The Fix</a:t>
@@ -9205,7 +9205,7 @@
             <a:r>
               <a:rPr sz="1400" b="1">
                 <a:solidFill>
-                  <a:srgbClr val="DA291C"/>
+                  <a:srgbClr val="EC0000"/>
                 </a:solidFill>
               </a:rPr>
               <a:t>Result</a:t>
@@ -9357,7 +9357,7 @@
             <a:avLst/>
           </a:prstGeom>
           <a:solidFill>
-            <a:srgbClr val="DA291C"/>
+            <a:srgbClr val="EC0000"/>
           </a:solidFill>
           <a:ln>
             <a:noFill/>
@@ -9400,7 +9400,7 @@
             <a:avLst/>
           </a:prstGeom>
           <a:solidFill>
-            <a:srgbClr val="FAF6EF"/>
+            <a:srgbClr val="FBF1EA"/>
           </a:solidFill>
           <a:ln>
             <a:noFill/>
@@ -9477,7 +9477,7 @@
             <a:avLst/>
           </a:prstGeom>
           <a:solidFill>
-            <a:srgbClr val="DA291C"/>
+            <a:srgbClr val="EC0000"/>
           </a:solidFill>
           <a:ln>
             <a:noFill/>
@@ -9531,7 +9531,7 @@
             <a:r>
               <a:rPr sz="1400" b="1">
                 <a:solidFill>
-                  <a:srgbClr val="DA291C"/>
+                  <a:srgbClr val="EC0000"/>
                 </a:solidFill>
               </a:rPr>
               <a:t>Previous State</a:t>
@@ -9599,7 +9599,7 @@
             <a:r>
               <a:rPr sz="1400" b="1">
                 <a:solidFill>
-                  <a:srgbClr val="DA291C"/>
+                  <a:srgbClr val="EC0000"/>
                 </a:solidFill>
               </a:rPr>
               <a:t>Updated</a:t>
@@ -9905,7 +9905,7 @@
             <a:r>
               <a:rPr sz="1400" b="1">
                 <a:solidFill>
-                  <a:srgbClr val="DA291C"/>
+                  <a:srgbClr val="EC0000"/>
                 </a:solidFill>
               </a:rPr>
               <a:t>Result</a:t>
@@ -10057,7 +10057,7 @@
             <a:avLst/>
           </a:prstGeom>
           <a:solidFill>
-            <a:srgbClr val="DA291C"/>
+            <a:srgbClr val="EC0000"/>
           </a:solidFill>
           <a:ln>
             <a:noFill/>
@@ -10100,7 +10100,7 @@
             <a:avLst/>
           </a:prstGeom>
           <a:solidFill>
-            <a:srgbClr val="FAF6EF"/>
+            <a:srgbClr val="FBF1EA"/>
           </a:solidFill>
           <a:ln>
             <a:noFill/>
@@ -10177,7 +10177,7 @@
             <a:avLst/>
           </a:prstGeom>
           <a:solidFill>
-            <a:srgbClr val="DA291C"/>
+            <a:srgbClr val="EC0000"/>
           </a:solidFill>
           <a:ln>
             <a:noFill/>
@@ -10231,7 +10231,7 @@
             <a:r>
               <a:rPr sz="1400" b="1">
                 <a:solidFill>
-                  <a:srgbClr val="DA291C"/>
+                  <a:srgbClr val="EC0000"/>
                 </a:solidFill>
               </a:rPr>
               <a:t>Problem</a:t>
@@ -10333,7 +10333,7 @@
             <a:r>
               <a:rPr sz="1400" b="1">
                 <a:solidFill>
-                  <a:srgbClr val="DA291C"/>
+                  <a:srgbClr val="EC0000"/>
                 </a:solidFill>
               </a:rPr>
               <a:t>Solution</a:t>
@@ -10503,7 +10503,7 @@
             <a:r>
               <a:rPr sz="1400" b="1">
                 <a:solidFill>
-                  <a:srgbClr val="DA291C"/>
+                  <a:srgbClr val="EC0000"/>
                 </a:solidFill>
               </a:rPr>
               <a:t>How to use</a:t>
@@ -10689,7 +10689,7 @@
             <a:avLst/>
           </a:prstGeom>
           <a:solidFill>
-            <a:srgbClr val="DA291C"/>
+            <a:srgbClr val="EC0000"/>
           </a:solidFill>
           <a:ln>
             <a:noFill/>
@@ -10861,7 +10861,7 @@
             <a:avLst/>
           </a:prstGeom>
           <a:solidFill>
-            <a:srgbClr val="DA291C"/>
+            <a:srgbClr val="EC0000"/>
           </a:solidFill>
           <a:ln>
             <a:noFill/>
@@ -10904,7 +10904,7 @@
             <a:avLst/>
           </a:prstGeom>
           <a:solidFill>
-            <a:srgbClr val="FAF6EF"/>
+            <a:srgbClr val="FBF1EA"/>
           </a:solidFill>
           <a:ln>
             <a:noFill/>
@@ -10981,7 +10981,7 @@
             <a:avLst/>
           </a:prstGeom>
           <a:solidFill>
-            <a:srgbClr val="DA291C"/>
+            <a:srgbClr val="EC0000"/>
           </a:solidFill>
           <a:ln>
             <a:noFill/>
@@ -11035,7 +11035,7 @@
             <a:r>
               <a:rPr sz="1400" b="1">
                 <a:solidFill>
-                  <a:srgbClr val="DA291C"/>
+                  <a:srgbClr val="EC0000"/>
                 </a:solidFill>
               </a:rPr>
               <a:t>What was stale</a:t>
@@ -11307,7 +11307,7 @@
             <a:r>
               <a:rPr sz="1400" b="1">
                 <a:solidFill>
-                  <a:srgbClr val="DA291C"/>
+                  <a:srgbClr val="EC0000"/>
                 </a:solidFill>
               </a:rPr>
               <a:t>What was added</a:t>
@@ -11561,7 +11561,7 @@
             <a:avLst/>
           </a:prstGeom>
           <a:solidFill>
-            <a:srgbClr val="DA291C"/>
+            <a:srgbClr val="EC0000"/>
           </a:solidFill>
           <a:ln>
             <a:noFill/>
@@ -11604,7 +11604,7 @@
             <a:avLst/>
           </a:prstGeom>
           <a:solidFill>
-            <a:srgbClr val="FAF6EF"/>
+            <a:srgbClr val="FBF1EA"/>
           </a:solidFill>
           <a:ln>
             <a:noFill/>
@@ -11681,7 +11681,7 @@
             <a:avLst/>
           </a:prstGeom>
           <a:solidFill>
-            <a:srgbClr val="DA291C"/>
+            <a:srgbClr val="EC0000"/>
           </a:solidFill>
           <a:ln>
             <a:noFill/>
@@ -11735,7 +11735,7 @@
             <a:r>
               <a:rPr sz="1400" b="1">
                 <a:solidFill>
-                  <a:srgbClr val="DA291C"/>
+                  <a:srgbClr val="EC0000"/>
                 </a:solidFill>
               </a:rPr>
               <a:t>Previous state: 52 sections · ~9,800 lines · 66 books</a:t>
@@ -11769,7 +11769,7 @@
             <a:r>
               <a:rPr sz="1400" b="1">
                 <a:solidFill>
-                  <a:srgbClr val="DA291C"/>
+                  <a:srgbClr val="EC0000"/>
                 </a:solidFill>
               </a:rPr>
               <a:t>Added in this session:</a:t>
@@ -11973,7 +11973,7 @@
             <a:r>
               <a:rPr sz="1400" b="1">
                 <a:solidFill>
-                  <a:srgbClr val="DA291C"/>
+                  <a:srgbClr val="EC0000"/>
                 </a:solidFill>
               </a:rPr>
               <a:t>Current state: 57 sections · 12,523 lines · 71 books</a:t>
